--- a/docs/apresentacao/Tech_Challenge_Fase4_STAR.pptx
+++ b/docs/apresentacao/Tech_Challenge_Fase4_STAR.pptx
@@ -2,20 +2,20 @@
 <file path=ppt/presentation.xml><?xml version="1.0" encoding="utf-8"?>
 <p:presentation xmlns:p="http://schemas.openxmlformats.org/presentationml/2006/main">
   <p:sldMasterIdLst>
-    <p:sldMasterId xmlns:r="http://schemas.openxmlformats.org/officeDocument/2006/relationships" id="2147483648" r:id="R46750c2c9f8741e7"/>
+    <p:sldMasterId xmlns:r="http://schemas.openxmlformats.org/officeDocument/2006/relationships" id="2147483648" r:id="Rc754fa99990f4eb1"/>
   </p:sldMasterIdLst>
   <p:notesMasterIdLst>
-    <p:notesMasterId xmlns:r="http://schemas.openxmlformats.org/officeDocument/2006/relationships" r:id="R07ada17441394ca6"/>
+    <p:notesMasterId xmlns:r="http://schemas.openxmlformats.org/officeDocument/2006/relationships" r:id="R0582816f6ceb4c61"/>
   </p:notesMasterIdLst>
   <p:sldIdLst>
-    <p:sldId xmlns:r="http://schemas.openxmlformats.org/officeDocument/2006/relationships" id="256" r:id="Rbe6a00d55dff4282"/>
-    <p:sldId xmlns:r="http://schemas.openxmlformats.org/officeDocument/2006/relationships" id="257" r:id="R2561196e23894fc1"/>
-    <p:sldId xmlns:r="http://schemas.openxmlformats.org/officeDocument/2006/relationships" id="258" r:id="R774c4e3342e8404b"/>
-    <p:sldId xmlns:r="http://schemas.openxmlformats.org/officeDocument/2006/relationships" id="259" r:id="R0130e51a9f884daa"/>
-    <p:sldId xmlns:r="http://schemas.openxmlformats.org/officeDocument/2006/relationships" id="260" r:id="R3ccda698e5764126"/>
-    <p:sldId xmlns:r="http://schemas.openxmlformats.org/officeDocument/2006/relationships" id="261" r:id="R4979bccc63384f0a"/>
-    <p:sldId xmlns:r="http://schemas.openxmlformats.org/officeDocument/2006/relationships" id="262" r:id="R16115eee40634c45"/>
-    <p:sldId xmlns:r="http://schemas.openxmlformats.org/officeDocument/2006/relationships" id="263" r:id="R7c42d42478844cc5"/>
+    <p:sldId xmlns:r="http://schemas.openxmlformats.org/officeDocument/2006/relationships" id="256" r:id="Rdacea871e4c544c1"/>
+    <p:sldId xmlns:r="http://schemas.openxmlformats.org/officeDocument/2006/relationships" id="257" r:id="R02388fda1f7743b1"/>
+    <p:sldId xmlns:r="http://schemas.openxmlformats.org/officeDocument/2006/relationships" id="258" r:id="R5a48019794314fec"/>
+    <p:sldId xmlns:r="http://schemas.openxmlformats.org/officeDocument/2006/relationships" id="259" r:id="R8db7c7b865384c67"/>
+    <p:sldId xmlns:r="http://schemas.openxmlformats.org/officeDocument/2006/relationships" id="260" r:id="R5582a1b540b44a28"/>
+    <p:sldId xmlns:r="http://schemas.openxmlformats.org/officeDocument/2006/relationships" id="261" r:id="R12f2d37a630d412f"/>
+    <p:sldId xmlns:r="http://schemas.openxmlformats.org/officeDocument/2006/relationships" id="262" r:id="R78ec816359bd4ecb"/>
+    <p:sldId xmlns:r="http://schemas.openxmlformats.org/officeDocument/2006/relationships" id="263" r:id="Rac94f805adaa4ad6"/>
   </p:sldIdLst>
   <p:sldSz cx="12192000" cy="6858000"/>
   <p:notesSz cx="6858000" cy="9144000"/>
@@ -784,7 +784,7 @@
           </a:p>
           <a:p xmlns:a="http://schemas.openxmlformats.org/drawingml/2006/main">
             <a:r>
-              <a:t>Neste teste, o lote violou o contrato de dados. As regras incluem identificador único e positivo, faixa de idade válida e limite de crédito maior que zero, além de tipos, nulidade e outras restrições. O pipeline rejeitou o lote inteiro, com 5.810 registros, antes de gerar qualquer predição. O print mostra a execução invalid no MLflow com status Failed. Esse status é esperado: ele registra a rejeição controlada. Assim, uma entrada inválida fica rastreável e não avança silenciosamente pelo fluxo.</a:t>
+              <a:t>Aqui está o fluxo funcionando com o lote válido. O pipeline aceitou os 5.810 registros e concluiu todas as predições. O print real do MLflow mostra o cenário control com status Finished, sucesso na inferência e 5.810 entradas. Não houve rejeições nem alertas de drift, e a ROC-AUC foi 0,771. Em um teste separado, inseri de propósito idade de doze anos, limite negativo e ID duplicado. Somente essa cópia inválida foi bloqueada antes da predição. Assim, comprovei tanto o funcionamento normal quanto a proteção contra dados incorretos.</a:t>
             </a:r>
           </a:p>
           <a:p xmlns:a="http://schemas.openxmlformats.org/drawingml/2006/main">
@@ -799,17 +799,22 @@
           </a:p>
           <a:p xmlns:a="http://schemas.openxmlformats.org/drawingml/2006/main">
             <a:r>
-              <a:t>https://github.com/ygormartinelli/tech-challenge-fase-4/blob/main/reports/evidence/summary.json</a:t>
+              <a:t>https://github.com/ygormartinelli/tech-challenge-fase-4/blob/main/reports/evidence/confirmation-54c176366b40.json</a:t>
             </a:r>
           </a:p>
           <a:p xmlns:a="http://schemas.openxmlformats.org/drawingml/2006/main">
             <a:r>
-              <a:t>https://github.com/ygormartinelli/tech-challenge-fase-4/blob/main/reports/evidence/mlflow-rejected.jpg</a:t>
+              <a:t>https://github.com/ygormartinelli/tech-challenge-fase-4/blob/main/reports/evidence/mlflow-control.jpg</a:t>
             </a:r>
           </a:p>
           <a:p xmlns:a="http://schemas.openxmlformats.org/drawingml/2006/main">
             <a:r>
-              <a:t>Print da execução local a060aa620fa2, run e7cc6483b67c418c9fc37aeef955171f. A reprodução independente documenta o mesmo comportamento com outros IDs.</a:t>
+              <a:t>Execução 54c176366b40, commit c1c0393e0a888ce299d8100f4c885cddb1807867, árvore limpa. Run control: 01844b2da8dc43c9b77eae15b04fb32c.</a:t>
+            </a:r>
+          </a:p>
+          <a:p xmlns:a="http://schemas.openxmlformats.org/drawingml/2006/main">
+            <a:r>
+              <a:t>O print está recortado apenas para ampliar cabeçalho, métricas de inferência e status. A captura original permanece no repositório.</a:t>
             </a:r>
           </a:p>
         </p:txBody>
@@ -3697,12 +3702,12 @@
   </p:cSld>
   <p:clrMap bg1="lt1" tx1="dk1" bg2="lt2" tx2="dk2" accent1="accent1" accent2="accent2" accent3="accent3" accent4="accent4" accent5="accent5" accent6="accent6" hlink="hlink" folHlink="folHlink"/>
   <p:sldLayoutIdLst>
-    <p:sldLayoutId xmlns:r="http://schemas.openxmlformats.org/officeDocument/2006/relationships" id="2147483649" r:id="R35abb339f3544c20"/>
-    <p:sldLayoutId xmlns:r="http://schemas.openxmlformats.org/officeDocument/2006/relationships" id="2147483650" r:id="Rd3a7bf0966704a3d"/>
-    <p:sldLayoutId xmlns:r="http://schemas.openxmlformats.org/officeDocument/2006/relationships" id="2147483651" r:id="R438519cdac424d50"/>
-    <p:sldLayoutId xmlns:r="http://schemas.openxmlformats.org/officeDocument/2006/relationships" id="2147483652" r:id="Rc4df9a4ad45f4849"/>
-    <p:sldLayoutId xmlns:r="http://schemas.openxmlformats.org/officeDocument/2006/relationships" id="2147483653" r:id="R12f2f706b3724a46"/>
-    <p:sldLayoutId xmlns:r="http://schemas.openxmlformats.org/officeDocument/2006/relationships" id="2147483654" r:id="Rcfe884eb77eb48e0"/>
+    <p:sldLayoutId xmlns:r="http://schemas.openxmlformats.org/officeDocument/2006/relationships" id="2147483649" r:id="Rf7a4f60e32914843"/>
+    <p:sldLayoutId xmlns:r="http://schemas.openxmlformats.org/officeDocument/2006/relationships" id="2147483650" r:id="Re761f89a3a594b11"/>
+    <p:sldLayoutId xmlns:r="http://schemas.openxmlformats.org/officeDocument/2006/relationships" id="2147483651" r:id="R5599539fdc7441f4"/>
+    <p:sldLayoutId xmlns:r="http://schemas.openxmlformats.org/officeDocument/2006/relationships" id="2147483652" r:id="Ref4445b85b9847f7"/>
+    <p:sldLayoutId xmlns:r="http://schemas.openxmlformats.org/officeDocument/2006/relationships" id="2147483653" r:id="R56851eb163814ff4"/>
+    <p:sldLayoutId xmlns:r="http://schemas.openxmlformats.org/officeDocument/2006/relationships" id="2147483654" r:id="R2b43717aedf844bd"/>
   </p:sldLayoutIdLst>
   <p:txStyles>
     <p:titleStyle>
@@ -4253,7 +4258,7 @@
           <p:cNvPr id="7" name="">
             <a:extLst xmlns:a="http://schemas.openxmlformats.org/drawingml/2006/main">
               <a:ext uri="{FF2B5EF4-FFF2-40B4-BE49-F238E27FC236}">
-                <a16:creationId xmlns:a16="http://schemas.microsoft.com/office/drawing/2014/main" id="{65AB0018-9872-4D3A-B900-53C608F09B61}"/>
+                <a16:creationId xmlns:a16="http://schemas.microsoft.com/office/drawing/2014/main" id="{5FC56D0D-E504-420B-9880-42EF9F4421DD}"/>
               </a:ext>
             </a:extLst>
           </p:cNvPr>
@@ -4263,7 +4268,7 @@
           <p:nvPr/>
         </p:nvPicPr>
         <p:blipFill>
-          <a:blip xmlns:r="http://schemas.openxmlformats.org/officeDocument/2006/relationships" xmlns:a="http://schemas.openxmlformats.org/drawingml/2006/main" r:embed="R14926db082224018"/>
+          <a:blip xmlns:r="http://schemas.openxmlformats.org/officeDocument/2006/relationships" xmlns:a="http://schemas.openxmlformats.org/drawingml/2006/main" r:embed="R115a3c4c0e1748f6"/>
           <a:stretch xmlns:a="http://schemas.openxmlformats.org/drawingml/2006/main"/>
         </p:blipFill>
         <p:spPr>
@@ -4319,6 +4324,7 @@
               </a:defRPr>
             </a:defPPr>
             <a:lvl1pPr>
+              <a:buNone/>
               <a:defRPr sz="1500" b="1">
                 <a:solidFill>
                   <a:srgbClr val="83E3CD"/>
@@ -4329,6 +4335,7 @@
               </a:defRPr>
             </a:lvl1pPr>
             <a:lvl2pPr>
+              <a:buNone/>
               <a:defRPr sz="1500" b="1">
                 <a:solidFill>
                   <a:srgbClr val="83E3CD"/>
@@ -4339,6 +4346,7 @@
               </a:defRPr>
             </a:lvl2pPr>
             <a:lvl3pPr>
+              <a:buNone/>
               <a:defRPr sz="1500" b="1">
                 <a:solidFill>
                   <a:srgbClr val="83E3CD"/>
@@ -4349,6 +4357,7 @@
               </a:defRPr>
             </a:lvl3pPr>
             <a:lvl4pPr>
+              <a:buNone/>
               <a:defRPr sz="1500" b="1">
                 <a:solidFill>
                   <a:srgbClr val="83E3CD"/>
@@ -4359,6 +4368,7 @@
               </a:defRPr>
             </a:lvl4pPr>
             <a:lvl5pPr>
+              <a:buNone/>
               <a:defRPr sz="1500" b="1">
                 <a:solidFill>
                   <a:srgbClr val="83E3CD"/>
@@ -4369,6 +4379,7 @@
               </a:defRPr>
             </a:lvl5pPr>
             <a:lvl6pPr>
+              <a:buNone/>
               <a:defRPr sz="1500" b="1">
                 <a:solidFill>
                   <a:srgbClr val="83E3CD"/>
@@ -4379,6 +4390,7 @@
               </a:defRPr>
             </a:lvl6pPr>
             <a:lvl7pPr>
+              <a:buNone/>
               <a:defRPr sz="1500" b="1">
                 <a:solidFill>
                   <a:srgbClr val="83E3CD"/>
@@ -4389,6 +4401,7 @@
               </a:defRPr>
             </a:lvl7pPr>
             <a:lvl8pPr>
+              <a:buNone/>
               <a:defRPr sz="1500" b="1">
                 <a:solidFill>
                   <a:srgbClr val="83E3CD"/>
@@ -4399,6 +4412,7 @@
               </a:defRPr>
             </a:lvl8pPr>
             <a:lvl9pPr>
+              <a:buNone/>
               <a:defRPr sz="1500" b="1">
                 <a:solidFill>
                   <a:srgbClr val="83E3CD"/>
@@ -4411,6 +4425,7 @@
           </a:lstStyle>
           <a:p xmlns:a="http://schemas.openxmlformats.org/drawingml/2006/main">
             <a:pPr>
+              <a:buNone/>
               <a:defRPr sz="1500" b="1">
                 <a:solidFill>
                   <a:srgbClr val="83E3CD"/>
@@ -4477,6 +4492,7 @@
               </a:defRPr>
             </a:defPPr>
             <a:lvl1pPr>
+              <a:buNone/>
               <a:defRPr sz="4500" b="1">
                 <a:solidFill>
                   <a:srgbClr val="F7FAF8"/>
@@ -4487,6 +4503,7 @@
               </a:defRPr>
             </a:lvl1pPr>
             <a:lvl2pPr>
+              <a:buNone/>
               <a:defRPr sz="4500" b="1">
                 <a:solidFill>
                   <a:srgbClr val="F7FAF8"/>
@@ -4497,6 +4514,7 @@
               </a:defRPr>
             </a:lvl2pPr>
             <a:lvl3pPr>
+              <a:buNone/>
               <a:defRPr sz="4500" b="1">
                 <a:solidFill>
                   <a:srgbClr val="F7FAF8"/>
@@ -4507,6 +4525,7 @@
               </a:defRPr>
             </a:lvl3pPr>
             <a:lvl4pPr>
+              <a:buNone/>
               <a:defRPr sz="4500" b="1">
                 <a:solidFill>
                   <a:srgbClr val="F7FAF8"/>
@@ -4517,6 +4536,7 @@
               </a:defRPr>
             </a:lvl4pPr>
             <a:lvl5pPr>
+              <a:buNone/>
               <a:defRPr sz="4500" b="1">
                 <a:solidFill>
                   <a:srgbClr val="F7FAF8"/>
@@ -4527,6 +4547,7 @@
               </a:defRPr>
             </a:lvl5pPr>
             <a:lvl6pPr>
+              <a:buNone/>
               <a:defRPr sz="4500" b="1">
                 <a:solidFill>
                   <a:srgbClr val="F7FAF8"/>
@@ -4537,6 +4558,7 @@
               </a:defRPr>
             </a:lvl6pPr>
             <a:lvl7pPr>
+              <a:buNone/>
               <a:defRPr sz="4500" b="1">
                 <a:solidFill>
                   <a:srgbClr val="F7FAF8"/>
@@ -4547,6 +4569,7 @@
               </a:defRPr>
             </a:lvl7pPr>
             <a:lvl8pPr>
+              <a:buNone/>
               <a:defRPr sz="4500" b="1">
                 <a:solidFill>
                   <a:srgbClr val="F7FAF8"/>
@@ -4557,6 +4580,7 @@
               </a:defRPr>
             </a:lvl8pPr>
             <a:lvl9pPr>
+              <a:buNone/>
               <a:defRPr sz="4500" b="1">
                 <a:solidFill>
                   <a:srgbClr val="F7FAF8"/>
@@ -4569,6 +4593,7 @@
           </a:lstStyle>
           <a:p xmlns:a="http://schemas.openxmlformats.org/drawingml/2006/main">
             <a:pPr>
+              <a:buNone/>
               <a:defRPr sz="4500" b="1">
                 <a:solidFill>
                   <a:srgbClr val="F7FAF8"/>
@@ -4592,6 +4617,7 @@
           </a:p>
           <a:p xmlns:a="http://schemas.openxmlformats.org/drawingml/2006/main">
             <a:pPr>
+              <a:buNone/>
               <a:defRPr sz="4500" b="1">
                 <a:solidFill>
                   <a:srgbClr val="F7FAF8"/>
@@ -4658,6 +4684,7 @@
               </a:defRPr>
             </a:defPPr>
             <a:lvl1pPr>
+              <a:buNone/>
               <a:defRPr sz="2250" b="0">
                 <a:solidFill>
                   <a:srgbClr val="B9CFD2"/>
@@ -4668,6 +4695,7 @@
               </a:defRPr>
             </a:lvl1pPr>
             <a:lvl2pPr>
+              <a:buNone/>
               <a:defRPr sz="2250" b="0">
                 <a:solidFill>
                   <a:srgbClr val="B9CFD2"/>
@@ -4678,6 +4706,7 @@
               </a:defRPr>
             </a:lvl2pPr>
             <a:lvl3pPr>
+              <a:buNone/>
               <a:defRPr sz="2250" b="0">
                 <a:solidFill>
                   <a:srgbClr val="B9CFD2"/>
@@ -4688,6 +4717,7 @@
               </a:defRPr>
             </a:lvl3pPr>
             <a:lvl4pPr>
+              <a:buNone/>
               <a:defRPr sz="2250" b="0">
                 <a:solidFill>
                   <a:srgbClr val="B9CFD2"/>
@@ -4698,6 +4728,7 @@
               </a:defRPr>
             </a:lvl4pPr>
             <a:lvl5pPr>
+              <a:buNone/>
               <a:defRPr sz="2250" b="0">
                 <a:solidFill>
                   <a:srgbClr val="B9CFD2"/>
@@ -4708,6 +4739,7 @@
               </a:defRPr>
             </a:lvl5pPr>
             <a:lvl6pPr>
+              <a:buNone/>
               <a:defRPr sz="2250" b="0">
                 <a:solidFill>
                   <a:srgbClr val="B9CFD2"/>
@@ -4718,6 +4750,7 @@
               </a:defRPr>
             </a:lvl6pPr>
             <a:lvl7pPr>
+              <a:buNone/>
               <a:defRPr sz="2250" b="0">
                 <a:solidFill>
                   <a:srgbClr val="B9CFD2"/>
@@ -4728,6 +4761,7 @@
               </a:defRPr>
             </a:lvl7pPr>
             <a:lvl8pPr>
+              <a:buNone/>
               <a:defRPr sz="2250" b="0">
                 <a:solidFill>
                   <a:srgbClr val="B9CFD2"/>
@@ -4738,6 +4772,7 @@
               </a:defRPr>
             </a:lvl8pPr>
             <a:lvl9pPr>
+              <a:buNone/>
               <a:defRPr sz="2250" b="0">
                 <a:solidFill>
                   <a:srgbClr val="B9CFD2"/>
@@ -4750,6 +4785,7 @@
           </a:lstStyle>
           <a:p xmlns:a="http://schemas.openxmlformats.org/drawingml/2006/main">
             <a:pPr>
+              <a:buNone/>
               <a:defRPr sz="2250" b="0">
                 <a:solidFill>
                   <a:srgbClr val="B9CFD2"/>
@@ -4773,6 +4809,7 @@
           </a:p>
           <a:p xmlns:a="http://schemas.openxmlformats.org/drawingml/2006/main">
             <a:pPr>
+              <a:buNone/>
               <a:defRPr sz="2250" b="0">
                 <a:solidFill>
                   <a:srgbClr val="B9CFD2"/>
@@ -4839,6 +4876,7 @@
               </a:defRPr>
             </a:defPPr>
             <a:lvl1pPr>
+              <a:buNone/>
               <a:defRPr sz="2100" b="1">
                 <a:solidFill>
                   <a:srgbClr val="F7FAF8"/>
@@ -4849,6 +4887,7 @@
               </a:defRPr>
             </a:lvl1pPr>
             <a:lvl2pPr>
+              <a:buNone/>
               <a:defRPr sz="2100" b="1">
                 <a:solidFill>
                   <a:srgbClr val="F7FAF8"/>
@@ -4859,6 +4898,7 @@
               </a:defRPr>
             </a:lvl2pPr>
             <a:lvl3pPr>
+              <a:buNone/>
               <a:defRPr sz="2100" b="1">
                 <a:solidFill>
                   <a:srgbClr val="F7FAF8"/>
@@ -4869,6 +4909,7 @@
               </a:defRPr>
             </a:lvl3pPr>
             <a:lvl4pPr>
+              <a:buNone/>
               <a:defRPr sz="2100" b="1">
                 <a:solidFill>
                   <a:srgbClr val="F7FAF8"/>
@@ -4879,6 +4920,7 @@
               </a:defRPr>
             </a:lvl4pPr>
             <a:lvl5pPr>
+              <a:buNone/>
               <a:defRPr sz="2100" b="1">
                 <a:solidFill>
                   <a:srgbClr val="F7FAF8"/>
@@ -4889,6 +4931,7 @@
               </a:defRPr>
             </a:lvl5pPr>
             <a:lvl6pPr>
+              <a:buNone/>
               <a:defRPr sz="2100" b="1">
                 <a:solidFill>
                   <a:srgbClr val="F7FAF8"/>
@@ -4899,6 +4942,7 @@
               </a:defRPr>
             </a:lvl6pPr>
             <a:lvl7pPr>
+              <a:buNone/>
               <a:defRPr sz="2100" b="1">
                 <a:solidFill>
                   <a:srgbClr val="F7FAF8"/>
@@ -4909,6 +4953,7 @@
               </a:defRPr>
             </a:lvl7pPr>
             <a:lvl8pPr>
+              <a:buNone/>
               <a:defRPr sz="2100" b="1">
                 <a:solidFill>
                   <a:srgbClr val="F7FAF8"/>
@@ -4919,6 +4964,7 @@
               </a:defRPr>
             </a:lvl8pPr>
             <a:lvl9pPr>
+              <a:buNone/>
               <a:defRPr sz="2100" b="1">
                 <a:solidFill>
                   <a:srgbClr val="F7FAF8"/>
@@ -4931,6 +4977,7 @@
           </a:lstStyle>
           <a:p xmlns:a="http://schemas.openxmlformats.org/drawingml/2006/main">
             <a:pPr>
+              <a:buNone/>
               <a:defRPr sz="2100" b="1">
                 <a:solidFill>
                   <a:srgbClr val="F7FAF8"/>
@@ -4997,6 +5044,7 @@
               </a:defRPr>
             </a:defPPr>
             <a:lvl1pPr>
+              <a:buNone/>
               <a:defRPr sz="1500" b="0">
                 <a:solidFill>
                   <a:srgbClr val="83E3CD"/>
@@ -5007,6 +5055,7 @@
               </a:defRPr>
             </a:lvl1pPr>
             <a:lvl2pPr>
+              <a:buNone/>
               <a:defRPr sz="1500" b="0">
                 <a:solidFill>
                   <a:srgbClr val="83E3CD"/>
@@ -5017,6 +5066,7 @@
               </a:defRPr>
             </a:lvl2pPr>
             <a:lvl3pPr>
+              <a:buNone/>
               <a:defRPr sz="1500" b="0">
                 <a:solidFill>
                   <a:srgbClr val="83E3CD"/>
@@ -5027,6 +5077,7 @@
               </a:defRPr>
             </a:lvl3pPr>
             <a:lvl4pPr>
+              <a:buNone/>
               <a:defRPr sz="1500" b="0">
                 <a:solidFill>
                   <a:srgbClr val="83E3CD"/>
@@ -5037,6 +5088,7 @@
               </a:defRPr>
             </a:lvl4pPr>
             <a:lvl5pPr>
+              <a:buNone/>
               <a:defRPr sz="1500" b="0">
                 <a:solidFill>
                   <a:srgbClr val="83E3CD"/>
@@ -5047,6 +5099,7 @@
               </a:defRPr>
             </a:lvl5pPr>
             <a:lvl6pPr>
+              <a:buNone/>
               <a:defRPr sz="1500" b="0">
                 <a:solidFill>
                   <a:srgbClr val="83E3CD"/>
@@ -5057,6 +5110,7 @@
               </a:defRPr>
             </a:lvl6pPr>
             <a:lvl7pPr>
+              <a:buNone/>
               <a:defRPr sz="1500" b="0">
                 <a:solidFill>
                   <a:srgbClr val="83E3CD"/>
@@ -5067,6 +5121,7 @@
               </a:defRPr>
             </a:lvl7pPr>
             <a:lvl8pPr>
+              <a:buNone/>
               <a:defRPr sz="1500" b="0">
                 <a:solidFill>
                   <a:srgbClr val="83E3CD"/>
@@ -5077,6 +5132,7 @@
               </a:defRPr>
             </a:lvl8pPr>
             <a:lvl9pPr>
+              <a:buNone/>
               <a:defRPr sz="1500" b="0">
                 <a:solidFill>
                   <a:srgbClr val="83E3CD"/>
@@ -5089,6 +5145,7 @@
           </a:lstStyle>
           <a:p xmlns:a="http://schemas.openxmlformats.org/drawingml/2006/main">
             <a:pPr>
+              <a:buNone/>
               <a:defRPr sz="1500" b="0">
                 <a:solidFill>
                   <a:srgbClr val="83E3CD"/>
@@ -5184,6 +5241,7 @@
               </a:defRPr>
             </a:defPPr>
             <a:lvl1pPr>
+              <a:buNone/>
               <a:defRPr sz="1350" b="1">
                 <a:solidFill>
                   <a:srgbClr val="0B716D"/>
@@ -5194,6 +5252,7 @@
               </a:defRPr>
             </a:lvl1pPr>
             <a:lvl2pPr>
+              <a:buNone/>
               <a:defRPr sz="1350" b="1">
                 <a:solidFill>
                   <a:srgbClr val="0B716D"/>
@@ -5204,6 +5263,7 @@
               </a:defRPr>
             </a:lvl2pPr>
             <a:lvl3pPr>
+              <a:buNone/>
               <a:defRPr sz="1350" b="1">
                 <a:solidFill>
                   <a:srgbClr val="0B716D"/>
@@ -5214,6 +5274,7 @@
               </a:defRPr>
             </a:lvl3pPr>
             <a:lvl4pPr>
+              <a:buNone/>
               <a:defRPr sz="1350" b="1">
                 <a:solidFill>
                   <a:srgbClr val="0B716D"/>
@@ -5224,6 +5285,7 @@
               </a:defRPr>
             </a:lvl4pPr>
             <a:lvl5pPr>
+              <a:buNone/>
               <a:defRPr sz="1350" b="1">
                 <a:solidFill>
                   <a:srgbClr val="0B716D"/>
@@ -5234,6 +5296,7 @@
               </a:defRPr>
             </a:lvl5pPr>
             <a:lvl6pPr>
+              <a:buNone/>
               <a:defRPr sz="1350" b="1">
                 <a:solidFill>
                   <a:srgbClr val="0B716D"/>
@@ -5244,6 +5307,7 @@
               </a:defRPr>
             </a:lvl6pPr>
             <a:lvl7pPr>
+              <a:buNone/>
               <a:defRPr sz="1350" b="1">
                 <a:solidFill>
                   <a:srgbClr val="0B716D"/>
@@ -5254,6 +5318,7 @@
               </a:defRPr>
             </a:lvl7pPr>
             <a:lvl8pPr>
+              <a:buNone/>
               <a:defRPr sz="1350" b="1">
                 <a:solidFill>
                   <a:srgbClr val="0B716D"/>
@@ -5264,6 +5329,7 @@
               </a:defRPr>
             </a:lvl8pPr>
             <a:lvl9pPr>
+              <a:buNone/>
               <a:defRPr sz="1350" b="1">
                 <a:solidFill>
                   <a:srgbClr val="0B716D"/>
@@ -5276,6 +5342,7 @@
           </a:lstStyle>
           <a:p xmlns:a="http://schemas.openxmlformats.org/drawingml/2006/main">
             <a:pPr>
+              <a:buNone/>
               <a:defRPr sz="1350" b="1">
                 <a:solidFill>
                   <a:srgbClr val="0B716D"/>
@@ -5342,6 +5409,7 @@
               </a:defRPr>
             </a:defPPr>
             <a:lvl1pPr>
+              <a:buNone/>
               <a:defRPr sz="3300" b="1">
                 <a:solidFill>
                   <a:srgbClr val="102E39"/>
@@ -5352,6 +5420,7 @@
               </a:defRPr>
             </a:lvl1pPr>
             <a:lvl2pPr>
+              <a:buNone/>
               <a:defRPr sz="3300" b="1">
                 <a:solidFill>
                   <a:srgbClr val="102E39"/>
@@ -5362,6 +5431,7 @@
               </a:defRPr>
             </a:lvl2pPr>
             <a:lvl3pPr>
+              <a:buNone/>
               <a:defRPr sz="3300" b="1">
                 <a:solidFill>
                   <a:srgbClr val="102E39"/>
@@ -5372,6 +5442,7 @@
               </a:defRPr>
             </a:lvl3pPr>
             <a:lvl4pPr>
+              <a:buNone/>
               <a:defRPr sz="3300" b="1">
                 <a:solidFill>
                   <a:srgbClr val="102E39"/>
@@ -5382,6 +5453,7 @@
               </a:defRPr>
             </a:lvl4pPr>
             <a:lvl5pPr>
+              <a:buNone/>
               <a:defRPr sz="3300" b="1">
                 <a:solidFill>
                   <a:srgbClr val="102E39"/>
@@ -5392,6 +5464,7 @@
               </a:defRPr>
             </a:lvl5pPr>
             <a:lvl6pPr>
+              <a:buNone/>
               <a:defRPr sz="3300" b="1">
                 <a:solidFill>
                   <a:srgbClr val="102E39"/>
@@ -5402,6 +5475,7 @@
               </a:defRPr>
             </a:lvl6pPr>
             <a:lvl7pPr>
+              <a:buNone/>
               <a:defRPr sz="3300" b="1">
                 <a:solidFill>
                   <a:srgbClr val="102E39"/>
@@ -5412,6 +5486,7 @@
               </a:defRPr>
             </a:lvl7pPr>
             <a:lvl8pPr>
+              <a:buNone/>
               <a:defRPr sz="3300" b="1">
                 <a:solidFill>
                   <a:srgbClr val="102E39"/>
@@ -5422,6 +5497,7 @@
               </a:defRPr>
             </a:lvl8pPr>
             <a:lvl9pPr>
+              <a:buNone/>
               <a:defRPr sz="3300" b="1">
                 <a:solidFill>
                   <a:srgbClr val="102E39"/>
@@ -5434,6 +5510,7 @@
           </a:lstStyle>
           <a:p xmlns:a="http://schemas.openxmlformats.org/drawingml/2006/main">
             <a:pPr>
+              <a:buNone/>
               <a:defRPr sz="3300" b="1">
                 <a:solidFill>
                   <a:srgbClr val="102E39"/>
@@ -5500,6 +5577,7 @@
               </a:defRPr>
             </a:defPPr>
             <a:lvl1pPr>
+              <a:buNone/>
               <a:defRPr sz="1200" b="0">
                 <a:solidFill>
                   <a:srgbClr val="526B72"/>
@@ -5510,6 +5588,7 @@
               </a:defRPr>
             </a:lvl1pPr>
             <a:lvl2pPr>
+              <a:buNone/>
               <a:defRPr sz="1200" b="0">
                 <a:solidFill>
                   <a:srgbClr val="526B72"/>
@@ -5520,6 +5599,7 @@
               </a:defRPr>
             </a:lvl2pPr>
             <a:lvl3pPr>
+              <a:buNone/>
               <a:defRPr sz="1200" b="0">
                 <a:solidFill>
                   <a:srgbClr val="526B72"/>
@@ -5530,6 +5610,7 @@
               </a:defRPr>
             </a:lvl3pPr>
             <a:lvl4pPr>
+              <a:buNone/>
               <a:defRPr sz="1200" b="0">
                 <a:solidFill>
                   <a:srgbClr val="526B72"/>
@@ -5540,6 +5621,7 @@
               </a:defRPr>
             </a:lvl4pPr>
             <a:lvl5pPr>
+              <a:buNone/>
               <a:defRPr sz="1200" b="0">
                 <a:solidFill>
                   <a:srgbClr val="526B72"/>
@@ -5550,6 +5632,7 @@
               </a:defRPr>
             </a:lvl5pPr>
             <a:lvl6pPr>
+              <a:buNone/>
               <a:defRPr sz="1200" b="0">
                 <a:solidFill>
                   <a:srgbClr val="526B72"/>
@@ -5560,6 +5643,7 @@
               </a:defRPr>
             </a:lvl6pPr>
             <a:lvl7pPr>
+              <a:buNone/>
               <a:defRPr sz="1200" b="0">
                 <a:solidFill>
                   <a:srgbClr val="526B72"/>
@@ -5570,6 +5654,7 @@
               </a:defRPr>
             </a:lvl7pPr>
             <a:lvl8pPr>
+              <a:buNone/>
               <a:defRPr sz="1200" b="0">
                 <a:solidFill>
                   <a:srgbClr val="526B72"/>
@@ -5580,6 +5665,7 @@
               </a:defRPr>
             </a:lvl8pPr>
             <a:lvl9pPr>
+              <a:buNone/>
               <a:defRPr sz="1200" b="0">
                 <a:solidFill>
                   <a:srgbClr val="526B72"/>
@@ -5592,6 +5678,7 @@
           </a:lstStyle>
           <a:p xmlns:a="http://schemas.openxmlformats.org/drawingml/2006/main">
             <a:pPr>
+              <a:buNone/>
               <a:defRPr sz="1200" b="0">
                 <a:solidFill>
                   <a:srgbClr val="526B72"/>
@@ -5658,6 +5745,7 @@
               </a:defRPr>
             </a:defPPr>
             <a:lvl1pPr>
+              <a:buNone/>
               <a:defRPr sz="1350" b="1">
                 <a:solidFill>
                   <a:srgbClr val="0B716D"/>
@@ -5668,6 +5756,7 @@
               </a:defRPr>
             </a:lvl1pPr>
             <a:lvl2pPr>
+              <a:buNone/>
               <a:defRPr sz="1350" b="1">
                 <a:solidFill>
                   <a:srgbClr val="0B716D"/>
@@ -5678,6 +5767,7 @@
               </a:defRPr>
             </a:lvl2pPr>
             <a:lvl3pPr>
+              <a:buNone/>
               <a:defRPr sz="1350" b="1">
                 <a:solidFill>
                   <a:srgbClr val="0B716D"/>
@@ -5688,6 +5778,7 @@
               </a:defRPr>
             </a:lvl3pPr>
             <a:lvl4pPr>
+              <a:buNone/>
               <a:defRPr sz="1350" b="1">
                 <a:solidFill>
                   <a:srgbClr val="0B716D"/>
@@ -5698,6 +5789,7 @@
               </a:defRPr>
             </a:lvl4pPr>
             <a:lvl5pPr>
+              <a:buNone/>
               <a:defRPr sz="1350" b="1">
                 <a:solidFill>
                   <a:srgbClr val="0B716D"/>
@@ -5708,6 +5800,7 @@
               </a:defRPr>
             </a:lvl5pPr>
             <a:lvl6pPr>
+              <a:buNone/>
               <a:defRPr sz="1350" b="1">
                 <a:solidFill>
                   <a:srgbClr val="0B716D"/>
@@ -5718,6 +5811,7 @@
               </a:defRPr>
             </a:lvl6pPr>
             <a:lvl7pPr>
+              <a:buNone/>
               <a:defRPr sz="1350" b="1">
                 <a:solidFill>
                   <a:srgbClr val="0B716D"/>
@@ -5728,6 +5822,7 @@
               </a:defRPr>
             </a:lvl7pPr>
             <a:lvl8pPr>
+              <a:buNone/>
               <a:defRPr sz="1350" b="1">
                 <a:solidFill>
                   <a:srgbClr val="0B716D"/>
@@ -5738,6 +5833,7 @@
               </a:defRPr>
             </a:lvl8pPr>
             <a:lvl9pPr>
+              <a:buNone/>
               <a:defRPr sz="1350" b="1">
                 <a:solidFill>
                   <a:srgbClr val="0B716D"/>
@@ -5750,6 +5846,7 @@
           </a:lstStyle>
           <a:p xmlns:a="http://schemas.openxmlformats.org/drawingml/2006/main">
             <a:pPr>
+              <a:buNone/>
               <a:defRPr sz="1350" b="1">
                 <a:solidFill>
                   <a:srgbClr val="0B716D"/>
@@ -5778,7 +5875,7 @@
           <p:cNvPr id="5" name="">
             <a:extLst xmlns:a="http://schemas.openxmlformats.org/drawingml/2006/main">
               <a:ext uri="{FF2B5EF4-FFF2-40B4-BE49-F238E27FC236}">
-                <a16:creationId xmlns:a16="http://schemas.microsoft.com/office/drawing/2014/main" id="{F3C17325-9C0B-40C3-B9D9-1159CCD20406}"/>
+                <a16:creationId xmlns:a16="http://schemas.microsoft.com/office/drawing/2014/main" id="{C130D319-16F6-4ED9-A577-B71D725C283F}"/>
               </a:ext>
             </a:extLst>
           </p:cNvPr>
@@ -6443,6 +6540,7 @@
               </a:defRPr>
             </a:defPPr>
             <a:lvl1pPr>
+              <a:buNone/>
               <a:defRPr sz="1800" b="0">
                 <a:solidFill>
                   <a:srgbClr val="526B72"/>
@@ -6453,6 +6551,7 @@
               </a:defRPr>
             </a:lvl1pPr>
             <a:lvl2pPr>
+              <a:buNone/>
               <a:defRPr sz="1800" b="0">
                 <a:solidFill>
                   <a:srgbClr val="526B72"/>
@@ -6463,6 +6562,7 @@
               </a:defRPr>
             </a:lvl2pPr>
             <a:lvl3pPr>
+              <a:buNone/>
               <a:defRPr sz="1800" b="0">
                 <a:solidFill>
                   <a:srgbClr val="526B72"/>
@@ -6473,6 +6573,7 @@
               </a:defRPr>
             </a:lvl3pPr>
             <a:lvl4pPr>
+              <a:buNone/>
               <a:defRPr sz="1800" b="0">
                 <a:solidFill>
                   <a:srgbClr val="526B72"/>
@@ -6483,6 +6584,7 @@
               </a:defRPr>
             </a:lvl4pPr>
             <a:lvl5pPr>
+              <a:buNone/>
               <a:defRPr sz="1800" b="0">
                 <a:solidFill>
                   <a:srgbClr val="526B72"/>
@@ -6493,6 +6595,7 @@
               </a:defRPr>
             </a:lvl5pPr>
             <a:lvl6pPr>
+              <a:buNone/>
               <a:defRPr sz="1800" b="0">
                 <a:solidFill>
                   <a:srgbClr val="526B72"/>
@@ -6503,6 +6606,7 @@
               </a:defRPr>
             </a:lvl6pPr>
             <a:lvl7pPr>
+              <a:buNone/>
               <a:defRPr sz="1800" b="0">
                 <a:solidFill>
                   <a:srgbClr val="526B72"/>
@@ -6513,6 +6617,7 @@
               </a:defRPr>
             </a:lvl7pPr>
             <a:lvl8pPr>
+              <a:buNone/>
               <a:defRPr sz="1800" b="0">
                 <a:solidFill>
                   <a:srgbClr val="526B72"/>
@@ -6523,6 +6628,7 @@
               </a:defRPr>
             </a:lvl8pPr>
             <a:lvl9pPr>
+              <a:buNone/>
               <a:defRPr sz="1800" b="0">
                 <a:solidFill>
                   <a:srgbClr val="526B72"/>
@@ -6535,6 +6641,7 @@
           </a:lstStyle>
           <a:p xmlns:a="http://schemas.openxmlformats.org/drawingml/2006/main">
             <a:pPr>
+              <a:buNone/>
               <a:defRPr sz="1800" b="0">
                 <a:solidFill>
                   <a:srgbClr val="526B72"/>
@@ -6630,6 +6737,7 @@
               </a:defRPr>
             </a:defPPr>
             <a:lvl1pPr>
+              <a:buNone/>
               <a:defRPr sz="1350" b="1">
                 <a:solidFill>
                   <a:srgbClr val="0B716D"/>
@@ -6640,6 +6748,7 @@
               </a:defRPr>
             </a:lvl1pPr>
             <a:lvl2pPr>
+              <a:buNone/>
               <a:defRPr sz="1350" b="1">
                 <a:solidFill>
                   <a:srgbClr val="0B716D"/>
@@ -6650,6 +6759,7 @@
               </a:defRPr>
             </a:lvl2pPr>
             <a:lvl3pPr>
+              <a:buNone/>
               <a:defRPr sz="1350" b="1">
                 <a:solidFill>
                   <a:srgbClr val="0B716D"/>
@@ -6660,6 +6770,7 @@
               </a:defRPr>
             </a:lvl3pPr>
             <a:lvl4pPr>
+              <a:buNone/>
               <a:defRPr sz="1350" b="1">
                 <a:solidFill>
                   <a:srgbClr val="0B716D"/>
@@ -6670,6 +6781,7 @@
               </a:defRPr>
             </a:lvl4pPr>
             <a:lvl5pPr>
+              <a:buNone/>
               <a:defRPr sz="1350" b="1">
                 <a:solidFill>
                   <a:srgbClr val="0B716D"/>
@@ -6680,6 +6792,7 @@
               </a:defRPr>
             </a:lvl5pPr>
             <a:lvl6pPr>
+              <a:buNone/>
               <a:defRPr sz="1350" b="1">
                 <a:solidFill>
                   <a:srgbClr val="0B716D"/>
@@ -6690,6 +6803,7 @@
               </a:defRPr>
             </a:lvl6pPr>
             <a:lvl7pPr>
+              <a:buNone/>
               <a:defRPr sz="1350" b="1">
                 <a:solidFill>
                   <a:srgbClr val="0B716D"/>
@@ -6700,6 +6814,7 @@
               </a:defRPr>
             </a:lvl7pPr>
             <a:lvl8pPr>
+              <a:buNone/>
               <a:defRPr sz="1350" b="1">
                 <a:solidFill>
                   <a:srgbClr val="0B716D"/>
@@ -6710,6 +6825,7 @@
               </a:defRPr>
             </a:lvl8pPr>
             <a:lvl9pPr>
+              <a:buNone/>
               <a:defRPr sz="1350" b="1">
                 <a:solidFill>
                   <a:srgbClr val="0B716D"/>
@@ -6722,6 +6838,7 @@
           </a:lstStyle>
           <a:p xmlns:a="http://schemas.openxmlformats.org/drawingml/2006/main">
             <a:pPr>
+              <a:buNone/>
               <a:defRPr sz="1350" b="1">
                 <a:solidFill>
                   <a:srgbClr val="0B716D"/>
@@ -6788,6 +6905,7 @@
               </a:defRPr>
             </a:defPPr>
             <a:lvl1pPr>
+              <a:buNone/>
               <a:defRPr sz="3300" b="1">
                 <a:solidFill>
                   <a:srgbClr val="102E39"/>
@@ -6798,6 +6916,7 @@
               </a:defRPr>
             </a:lvl1pPr>
             <a:lvl2pPr>
+              <a:buNone/>
               <a:defRPr sz="3300" b="1">
                 <a:solidFill>
                   <a:srgbClr val="102E39"/>
@@ -6808,6 +6927,7 @@
               </a:defRPr>
             </a:lvl2pPr>
             <a:lvl3pPr>
+              <a:buNone/>
               <a:defRPr sz="3300" b="1">
                 <a:solidFill>
                   <a:srgbClr val="102E39"/>
@@ -6818,6 +6938,7 @@
               </a:defRPr>
             </a:lvl3pPr>
             <a:lvl4pPr>
+              <a:buNone/>
               <a:defRPr sz="3300" b="1">
                 <a:solidFill>
                   <a:srgbClr val="102E39"/>
@@ -6828,6 +6949,7 @@
               </a:defRPr>
             </a:lvl4pPr>
             <a:lvl5pPr>
+              <a:buNone/>
               <a:defRPr sz="3300" b="1">
                 <a:solidFill>
                   <a:srgbClr val="102E39"/>
@@ -6838,6 +6960,7 @@
               </a:defRPr>
             </a:lvl5pPr>
             <a:lvl6pPr>
+              <a:buNone/>
               <a:defRPr sz="3300" b="1">
                 <a:solidFill>
                   <a:srgbClr val="102E39"/>
@@ -6848,6 +6971,7 @@
               </a:defRPr>
             </a:lvl6pPr>
             <a:lvl7pPr>
+              <a:buNone/>
               <a:defRPr sz="3300" b="1">
                 <a:solidFill>
                   <a:srgbClr val="102E39"/>
@@ -6858,6 +6982,7 @@
               </a:defRPr>
             </a:lvl7pPr>
             <a:lvl8pPr>
+              <a:buNone/>
               <a:defRPr sz="3300" b="1">
                 <a:solidFill>
                   <a:srgbClr val="102E39"/>
@@ -6868,6 +6993,7 @@
               </a:defRPr>
             </a:lvl8pPr>
             <a:lvl9pPr>
+              <a:buNone/>
               <a:defRPr sz="3300" b="1">
                 <a:solidFill>
                   <a:srgbClr val="102E39"/>
@@ -6880,6 +7006,7 @@
           </a:lstStyle>
           <a:p xmlns:a="http://schemas.openxmlformats.org/drawingml/2006/main">
             <a:pPr>
+              <a:buNone/>
               <a:defRPr sz="3300" b="1">
                 <a:solidFill>
                   <a:srgbClr val="102E39"/>
@@ -6946,6 +7073,7 @@
               </a:defRPr>
             </a:defPPr>
             <a:lvl1pPr>
+              <a:buNone/>
               <a:defRPr sz="1200" b="0">
                 <a:solidFill>
                   <a:srgbClr val="526B72"/>
@@ -6956,6 +7084,7 @@
               </a:defRPr>
             </a:lvl1pPr>
             <a:lvl2pPr>
+              <a:buNone/>
               <a:defRPr sz="1200" b="0">
                 <a:solidFill>
                   <a:srgbClr val="526B72"/>
@@ -6966,6 +7095,7 @@
               </a:defRPr>
             </a:lvl2pPr>
             <a:lvl3pPr>
+              <a:buNone/>
               <a:defRPr sz="1200" b="0">
                 <a:solidFill>
                   <a:srgbClr val="526B72"/>
@@ -6976,6 +7106,7 @@
               </a:defRPr>
             </a:lvl3pPr>
             <a:lvl4pPr>
+              <a:buNone/>
               <a:defRPr sz="1200" b="0">
                 <a:solidFill>
                   <a:srgbClr val="526B72"/>
@@ -6986,6 +7117,7 @@
               </a:defRPr>
             </a:lvl4pPr>
             <a:lvl5pPr>
+              <a:buNone/>
               <a:defRPr sz="1200" b="0">
                 <a:solidFill>
                   <a:srgbClr val="526B72"/>
@@ -6996,6 +7128,7 @@
               </a:defRPr>
             </a:lvl5pPr>
             <a:lvl6pPr>
+              <a:buNone/>
               <a:defRPr sz="1200" b="0">
                 <a:solidFill>
                   <a:srgbClr val="526B72"/>
@@ -7006,6 +7139,7 @@
               </a:defRPr>
             </a:lvl6pPr>
             <a:lvl7pPr>
+              <a:buNone/>
               <a:defRPr sz="1200" b="0">
                 <a:solidFill>
                   <a:srgbClr val="526B72"/>
@@ -7016,6 +7150,7 @@
               </a:defRPr>
             </a:lvl7pPr>
             <a:lvl8pPr>
+              <a:buNone/>
               <a:defRPr sz="1200" b="0">
                 <a:solidFill>
                   <a:srgbClr val="526B72"/>
@@ -7026,6 +7161,7 @@
               </a:defRPr>
             </a:lvl8pPr>
             <a:lvl9pPr>
+              <a:buNone/>
               <a:defRPr sz="1200" b="0">
                 <a:solidFill>
                   <a:srgbClr val="526B72"/>
@@ -7038,6 +7174,7 @@
           </a:lstStyle>
           <a:p xmlns:a="http://schemas.openxmlformats.org/drawingml/2006/main">
             <a:pPr>
+              <a:buNone/>
               <a:defRPr sz="1200" b="0">
                 <a:solidFill>
                   <a:srgbClr val="526B72"/>
@@ -7104,6 +7241,7 @@
               </a:defRPr>
             </a:defPPr>
             <a:lvl1pPr>
+              <a:buNone/>
               <a:defRPr sz="1350" b="1">
                 <a:solidFill>
                   <a:srgbClr val="0B716D"/>
@@ -7114,6 +7252,7 @@
               </a:defRPr>
             </a:lvl1pPr>
             <a:lvl2pPr>
+              <a:buNone/>
               <a:defRPr sz="1350" b="1">
                 <a:solidFill>
                   <a:srgbClr val="0B716D"/>
@@ -7124,6 +7263,7 @@
               </a:defRPr>
             </a:lvl2pPr>
             <a:lvl3pPr>
+              <a:buNone/>
               <a:defRPr sz="1350" b="1">
                 <a:solidFill>
                   <a:srgbClr val="0B716D"/>
@@ -7134,6 +7274,7 @@
               </a:defRPr>
             </a:lvl3pPr>
             <a:lvl4pPr>
+              <a:buNone/>
               <a:defRPr sz="1350" b="1">
                 <a:solidFill>
                   <a:srgbClr val="0B716D"/>
@@ -7144,6 +7285,7 @@
               </a:defRPr>
             </a:lvl4pPr>
             <a:lvl5pPr>
+              <a:buNone/>
               <a:defRPr sz="1350" b="1">
                 <a:solidFill>
                   <a:srgbClr val="0B716D"/>
@@ -7154,6 +7296,7 @@
               </a:defRPr>
             </a:lvl5pPr>
             <a:lvl6pPr>
+              <a:buNone/>
               <a:defRPr sz="1350" b="1">
                 <a:solidFill>
                   <a:srgbClr val="0B716D"/>
@@ -7164,6 +7307,7 @@
               </a:defRPr>
             </a:lvl6pPr>
             <a:lvl7pPr>
+              <a:buNone/>
               <a:defRPr sz="1350" b="1">
                 <a:solidFill>
                   <a:srgbClr val="0B716D"/>
@@ -7174,6 +7318,7 @@
               </a:defRPr>
             </a:lvl7pPr>
             <a:lvl8pPr>
+              <a:buNone/>
               <a:defRPr sz="1350" b="1">
                 <a:solidFill>
                   <a:srgbClr val="0B716D"/>
@@ -7184,6 +7329,7 @@
               </a:defRPr>
             </a:lvl8pPr>
             <a:lvl9pPr>
+              <a:buNone/>
               <a:defRPr sz="1350" b="1">
                 <a:solidFill>
                   <a:srgbClr val="0B716D"/>
@@ -7196,6 +7342,7 @@
           </a:lstStyle>
           <a:p xmlns:a="http://schemas.openxmlformats.org/drawingml/2006/main">
             <a:pPr>
+              <a:buNone/>
               <a:defRPr sz="1350" b="1">
                 <a:solidFill>
                   <a:srgbClr val="0B716D"/>
@@ -7262,6 +7409,7 @@
               </a:defRPr>
             </a:defPPr>
             <a:lvl1pPr>
+              <a:buNone/>
               <a:defRPr sz="5700" b="1">
                 <a:solidFill>
                   <a:srgbClr val="0B716D"/>
@@ -7272,6 +7420,7 @@
               </a:defRPr>
             </a:lvl1pPr>
             <a:lvl2pPr>
+              <a:buNone/>
               <a:defRPr sz="5700" b="1">
                 <a:solidFill>
                   <a:srgbClr val="0B716D"/>
@@ -7282,6 +7431,7 @@
               </a:defRPr>
             </a:lvl2pPr>
             <a:lvl3pPr>
+              <a:buNone/>
               <a:defRPr sz="5700" b="1">
                 <a:solidFill>
                   <a:srgbClr val="0B716D"/>
@@ -7292,6 +7442,7 @@
               </a:defRPr>
             </a:lvl3pPr>
             <a:lvl4pPr>
+              <a:buNone/>
               <a:defRPr sz="5700" b="1">
                 <a:solidFill>
                   <a:srgbClr val="0B716D"/>
@@ -7302,6 +7453,7 @@
               </a:defRPr>
             </a:lvl4pPr>
             <a:lvl5pPr>
+              <a:buNone/>
               <a:defRPr sz="5700" b="1">
                 <a:solidFill>
                   <a:srgbClr val="0B716D"/>
@@ -7312,6 +7464,7 @@
               </a:defRPr>
             </a:lvl5pPr>
             <a:lvl6pPr>
+              <a:buNone/>
               <a:defRPr sz="5700" b="1">
                 <a:solidFill>
                   <a:srgbClr val="0B716D"/>
@@ -7322,6 +7475,7 @@
               </a:defRPr>
             </a:lvl6pPr>
             <a:lvl7pPr>
+              <a:buNone/>
               <a:defRPr sz="5700" b="1">
                 <a:solidFill>
                   <a:srgbClr val="0B716D"/>
@@ -7332,6 +7486,7 @@
               </a:defRPr>
             </a:lvl7pPr>
             <a:lvl8pPr>
+              <a:buNone/>
               <a:defRPr sz="5700" b="1">
                 <a:solidFill>
                   <a:srgbClr val="0B716D"/>
@@ -7342,6 +7497,7 @@
               </a:defRPr>
             </a:lvl8pPr>
             <a:lvl9pPr>
+              <a:buNone/>
               <a:defRPr sz="5700" b="1">
                 <a:solidFill>
                   <a:srgbClr val="0B716D"/>
@@ -7354,6 +7510,7 @@
           </a:lstStyle>
           <a:p xmlns:a="http://schemas.openxmlformats.org/drawingml/2006/main">
             <a:pPr>
+              <a:buNone/>
               <a:defRPr sz="5700" b="1">
                 <a:solidFill>
                   <a:srgbClr val="0B716D"/>
@@ -7420,6 +7577,7 @@
               </a:defRPr>
             </a:defPPr>
             <a:lvl1pPr>
+              <a:buNone/>
               <a:defRPr sz="2100" b="0">
                 <a:solidFill>
                   <a:srgbClr val="102E39"/>
@@ -7430,6 +7588,7 @@
               </a:defRPr>
             </a:lvl1pPr>
             <a:lvl2pPr>
+              <a:buNone/>
               <a:defRPr sz="2100" b="0">
                 <a:solidFill>
                   <a:srgbClr val="102E39"/>
@@ -7440,6 +7599,7 @@
               </a:defRPr>
             </a:lvl2pPr>
             <a:lvl3pPr>
+              <a:buNone/>
               <a:defRPr sz="2100" b="0">
                 <a:solidFill>
                   <a:srgbClr val="102E39"/>
@@ -7450,6 +7610,7 @@
               </a:defRPr>
             </a:lvl3pPr>
             <a:lvl4pPr>
+              <a:buNone/>
               <a:defRPr sz="2100" b="0">
                 <a:solidFill>
                   <a:srgbClr val="102E39"/>
@@ -7460,6 +7621,7 @@
               </a:defRPr>
             </a:lvl4pPr>
             <a:lvl5pPr>
+              <a:buNone/>
               <a:defRPr sz="2100" b="0">
                 <a:solidFill>
                   <a:srgbClr val="102E39"/>
@@ -7470,6 +7632,7 @@
               </a:defRPr>
             </a:lvl5pPr>
             <a:lvl6pPr>
+              <a:buNone/>
               <a:defRPr sz="2100" b="0">
                 <a:solidFill>
                   <a:srgbClr val="102E39"/>
@@ -7480,6 +7643,7 @@
               </a:defRPr>
             </a:lvl6pPr>
             <a:lvl7pPr>
+              <a:buNone/>
               <a:defRPr sz="2100" b="0">
                 <a:solidFill>
                   <a:srgbClr val="102E39"/>
@@ -7490,6 +7654,7 @@
               </a:defRPr>
             </a:lvl7pPr>
             <a:lvl8pPr>
+              <a:buNone/>
               <a:defRPr sz="2100" b="0">
                 <a:solidFill>
                   <a:srgbClr val="102E39"/>
@@ -7500,6 +7665,7 @@
               </a:defRPr>
             </a:lvl8pPr>
             <a:lvl9pPr>
+              <a:buNone/>
               <a:defRPr sz="2100" b="0">
                 <a:solidFill>
                   <a:srgbClr val="102E39"/>
@@ -7512,6 +7678,7 @@
           </a:lstStyle>
           <a:p xmlns:a="http://schemas.openxmlformats.org/drawingml/2006/main">
             <a:pPr>
+              <a:buNone/>
               <a:defRPr sz="2100" b="0">
                 <a:solidFill>
                   <a:srgbClr val="102E39"/>
@@ -7578,6 +7745,7 @@
               </a:defRPr>
             </a:defPPr>
             <a:lvl1pPr>
+              <a:buNone/>
               <a:defRPr sz="1875" b="0">
                 <a:solidFill>
                   <a:srgbClr val="526B72"/>
@@ -7588,6 +7756,7 @@
               </a:defRPr>
             </a:lvl1pPr>
             <a:lvl2pPr>
+              <a:buNone/>
               <a:defRPr sz="1875" b="0">
                 <a:solidFill>
                   <a:srgbClr val="526B72"/>
@@ -7598,6 +7767,7 @@
               </a:defRPr>
             </a:lvl2pPr>
             <a:lvl3pPr>
+              <a:buNone/>
               <a:defRPr sz="1875" b="0">
                 <a:solidFill>
                   <a:srgbClr val="526B72"/>
@@ -7608,6 +7778,7 @@
               </a:defRPr>
             </a:lvl3pPr>
             <a:lvl4pPr>
+              <a:buNone/>
               <a:defRPr sz="1875" b="0">
                 <a:solidFill>
                   <a:srgbClr val="526B72"/>
@@ -7618,6 +7789,7 @@
               </a:defRPr>
             </a:lvl4pPr>
             <a:lvl5pPr>
+              <a:buNone/>
               <a:defRPr sz="1875" b="0">
                 <a:solidFill>
                   <a:srgbClr val="526B72"/>
@@ -7628,6 +7800,7 @@
               </a:defRPr>
             </a:lvl5pPr>
             <a:lvl6pPr>
+              <a:buNone/>
               <a:defRPr sz="1875" b="0">
                 <a:solidFill>
                   <a:srgbClr val="526B72"/>
@@ -7638,6 +7811,7 @@
               </a:defRPr>
             </a:lvl6pPr>
             <a:lvl7pPr>
+              <a:buNone/>
               <a:defRPr sz="1875" b="0">
                 <a:solidFill>
                   <a:srgbClr val="526B72"/>
@@ -7648,6 +7822,7 @@
               </a:defRPr>
             </a:lvl7pPr>
             <a:lvl8pPr>
+              <a:buNone/>
               <a:defRPr sz="1875" b="0">
                 <a:solidFill>
                   <a:srgbClr val="526B72"/>
@@ -7658,6 +7833,7 @@
               </a:defRPr>
             </a:lvl8pPr>
             <a:lvl9pPr>
+              <a:buNone/>
               <a:defRPr sz="1875" b="0">
                 <a:solidFill>
                   <a:srgbClr val="526B72"/>
@@ -7670,6 +7846,7 @@
           </a:lstStyle>
           <a:p xmlns:a="http://schemas.openxmlformats.org/drawingml/2006/main">
             <a:pPr>
+              <a:buNone/>
               <a:defRPr sz="1875" b="0">
                 <a:solidFill>
                   <a:srgbClr val="526B72"/>
@@ -7693,6 +7870,7 @@
           </a:p>
           <a:p xmlns:a="http://schemas.openxmlformats.org/drawingml/2006/main">
             <a:pPr>
+              <a:buNone/>
               <a:defRPr sz="1875" b="0">
                 <a:solidFill>
                   <a:srgbClr val="526B72"/>
@@ -7721,7 +7899,7 @@
           <p:cNvPr id="8" name="">
             <a:extLst xmlns:a="http://schemas.openxmlformats.org/drawingml/2006/main">
               <a:ext uri="{FF2B5EF4-FFF2-40B4-BE49-F238E27FC236}">
-                <a16:creationId xmlns:a16="http://schemas.microsoft.com/office/drawing/2014/main" id="{FA72505C-A8F0-4128-9809-204CCCB6175F}"/>
+                <a16:creationId xmlns:a16="http://schemas.microsoft.com/office/drawing/2014/main" id="{1C528C88-7C42-49DB-95DF-ACD5F362B163}"/>
               </a:ext>
             </a:extLst>
           </p:cNvPr>
@@ -8119,6 +8297,7 @@
               </a:defRPr>
             </a:defPPr>
             <a:lvl1pPr>
+              <a:buNone/>
               <a:defRPr sz="2250" b="1">
                 <a:solidFill>
                   <a:srgbClr val="102E39"/>
@@ -8129,6 +8308,7 @@
               </a:defRPr>
             </a:lvl1pPr>
             <a:lvl2pPr>
+              <a:buNone/>
               <a:defRPr sz="2250" b="1">
                 <a:solidFill>
                   <a:srgbClr val="102E39"/>
@@ -8139,6 +8319,7 @@
               </a:defRPr>
             </a:lvl2pPr>
             <a:lvl3pPr>
+              <a:buNone/>
               <a:defRPr sz="2250" b="1">
                 <a:solidFill>
                   <a:srgbClr val="102E39"/>
@@ -8149,6 +8330,7 @@
               </a:defRPr>
             </a:lvl3pPr>
             <a:lvl4pPr>
+              <a:buNone/>
               <a:defRPr sz="2250" b="1">
                 <a:solidFill>
                   <a:srgbClr val="102E39"/>
@@ -8159,6 +8341,7 @@
               </a:defRPr>
             </a:lvl4pPr>
             <a:lvl5pPr>
+              <a:buNone/>
               <a:defRPr sz="2250" b="1">
                 <a:solidFill>
                   <a:srgbClr val="102E39"/>
@@ -8169,6 +8352,7 @@
               </a:defRPr>
             </a:lvl5pPr>
             <a:lvl6pPr>
+              <a:buNone/>
               <a:defRPr sz="2250" b="1">
                 <a:solidFill>
                   <a:srgbClr val="102E39"/>
@@ -8179,6 +8363,7 @@
               </a:defRPr>
             </a:lvl6pPr>
             <a:lvl7pPr>
+              <a:buNone/>
               <a:defRPr sz="2250" b="1">
                 <a:solidFill>
                   <a:srgbClr val="102E39"/>
@@ -8189,6 +8374,7 @@
               </a:defRPr>
             </a:lvl7pPr>
             <a:lvl8pPr>
+              <a:buNone/>
               <a:defRPr sz="2250" b="1">
                 <a:solidFill>
                   <a:srgbClr val="102E39"/>
@@ -8199,6 +8385,7 @@
               </a:defRPr>
             </a:lvl8pPr>
             <a:lvl9pPr>
+              <a:buNone/>
               <a:defRPr sz="2250" b="1">
                 <a:solidFill>
                   <a:srgbClr val="102E39"/>
@@ -8211,6 +8398,7 @@
           </a:lstStyle>
           <a:p xmlns:a="http://schemas.openxmlformats.org/drawingml/2006/main">
             <a:pPr>
+              <a:buNone/>
               <a:defRPr sz="2250" b="1">
                 <a:solidFill>
                   <a:srgbClr val="102E39"/>
@@ -8277,6 +8465,7 @@
               </a:defRPr>
             </a:defPPr>
             <a:lvl1pPr>
+              <a:buNone/>
               <a:defRPr sz="1800" b="0">
                 <a:solidFill>
                   <a:srgbClr val="526B72"/>
@@ -8287,6 +8476,7 @@
               </a:defRPr>
             </a:lvl1pPr>
             <a:lvl2pPr>
+              <a:buNone/>
               <a:defRPr sz="1800" b="0">
                 <a:solidFill>
                   <a:srgbClr val="526B72"/>
@@ -8297,6 +8487,7 @@
               </a:defRPr>
             </a:lvl2pPr>
             <a:lvl3pPr>
+              <a:buNone/>
               <a:defRPr sz="1800" b="0">
                 <a:solidFill>
                   <a:srgbClr val="526B72"/>
@@ -8307,6 +8498,7 @@
               </a:defRPr>
             </a:lvl3pPr>
             <a:lvl4pPr>
+              <a:buNone/>
               <a:defRPr sz="1800" b="0">
                 <a:solidFill>
                   <a:srgbClr val="526B72"/>
@@ -8317,6 +8509,7 @@
               </a:defRPr>
             </a:lvl4pPr>
             <a:lvl5pPr>
+              <a:buNone/>
               <a:defRPr sz="1800" b="0">
                 <a:solidFill>
                   <a:srgbClr val="526B72"/>
@@ -8327,6 +8520,7 @@
               </a:defRPr>
             </a:lvl5pPr>
             <a:lvl6pPr>
+              <a:buNone/>
               <a:defRPr sz="1800" b="0">
                 <a:solidFill>
                   <a:srgbClr val="526B72"/>
@@ -8337,6 +8531,7 @@
               </a:defRPr>
             </a:lvl6pPr>
             <a:lvl7pPr>
+              <a:buNone/>
               <a:defRPr sz="1800" b="0">
                 <a:solidFill>
                   <a:srgbClr val="526B72"/>
@@ -8347,6 +8542,7 @@
               </a:defRPr>
             </a:lvl7pPr>
             <a:lvl8pPr>
+              <a:buNone/>
               <a:defRPr sz="1800" b="0">
                 <a:solidFill>
                   <a:srgbClr val="526B72"/>
@@ -8357,6 +8553,7 @@
               </a:defRPr>
             </a:lvl8pPr>
             <a:lvl9pPr>
+              <a:buNone/>
               <a:defRPr sz="1800" b="0">
                 <a:solidFill>
                   <a:srgbClr val="526B72"/>
@@ -8369,6 +8566,7 @@
           </a:lstStyle>
           <a:p xmlns:a="http://schemas.openxmlformats.org/drawingml/2006/main">
             <a:pPr>
+              <a:buNone/>
               <a:defRPr sz="1800" b="0">
                 <a:solidFill>
                   <a:srgbClr val="526B72"/>
@@ -8392,6 +8590,7 @@
           </a:p>
           <a:p xmlns:a="http://schemas.openxmlformats.org/drawingml/2006/main">
             <a:pPr>
+              <a:buNone/>
               <a:defRPr sz="1800" b="0">
                 <a:solidFill>
                   <a:srgbClr val="526B72"/>
@@ -8458,6 +8657,7 @@
               </a:defRPr>
             </a:defPPr>
             <a:lvl1pPr>
+              <a:buNone/>
               <a:defRPr sz="2775" b="1">
                 <a:solidFill>
                   <a:srgbClr val="0B716D"/>
@@ -8468,6 +8668,7 @@
               </a:defRPr>
             </a:lvl1pPr>
             <a:lvl2pPr>
+              <a:buNone/>
               <a:defRPr sz="2775" b="1">
                 <a:solidFill>
                   <a:srgbClr val="0B716D"/>
@@ -8478,6 +8679,7 @@
               </a:defRPr>
             </a:lvl2pPr>
             <a:lvl3pPr>
+              <a:buNone/>
               <a:defRPr sz="2775" b="1">
                 <a:solidFill>
                   <a:srgbClr val="0B716D"/>
@@ -8488,6 +8690,7 @@
               </a:defRPr>
             </a:lvl3pPr>
             <a:lvl4pPr>
+              <a:buNone/>
               <a:defRPr sz="2775" b="1">
                 <a:solidFill>
                   <a:srgbClr val="0B716D"/>
@@ -8498,6 +8701,7 @@
               </a:defRPr>
             </a:lvl4pPr>
             <a:lvl5pPr>
+              <a:buNone/>
               <a:defRPr sz="2775" b="1">
                 <a:solidFill>
                   <a:srgbClr val="0B716D"/>
@@ -8508,6 +8712,7 @@
               </a:defRPr>
             </a:lvl5pPr>
             <a:lvl6pPr>
+              <a:buNone/>
               <a:defRPr sz="2775" b="1">
                 <a:solidFill>
                   <a:srgbClr val="0B716D"/>
@@ -8518,6 +8723,7 @@
               </a:defRPr>
             </a:lvl6pPr>
             <a:lvl7pPr>
+              <a:buNone/>
               <a:defRPr sz="2775" b="1">
                 <a:solidFill>
                   <a:srgbClr val="0B716D"/>
@@ -8528,6 +8734,7 @@
               </a:defRPr>
             </a:lvl7pPr>
             <a:lvl8pPr>
+              <a:buNone/>
               <a:defRPr sz="2775" b="1">
                 <a:solidFill>
                   <a:srgbClr val="0B716D"/>
@@ -8538,6 +8745,7 @@
               </a:defRPr>
             </a:lvl8pPr>
             <a:lvl9pPr>
+              <a:buNone/>
               <a:defRPr sz="2775" b="1">
                 <a:solidFill>
                   <a:srgbClr val="0B716D"/>
@@ -8550,6 +8758,7 @@
           </a:lstStyle>
           <a:p xmlns:a="http://schemas.openxmlformats.org/drawingml/2006/main">
             <a:pPr>
+              <a:buNone/>
               <a:defRPr sz="2775" b="1">
                 <a:solidFill>
                   <a:srgbClr val="0B716D"/>
@@ -8616,6 +8825,7 @@
               </a:defRPr>
             </a:defPPr>
             <a:lvl1pPr>
+              <a:buNone/>
               <a:defRPr sz="1800" b="0">
                 <a:solidFill>
                   <a:srgbClr val="526B72"/>
@@ -8626,6 +8836,7 @@
               </a:defRPr>
             </a:lvl1pPr>
             <a:lvl2pPr>
+              <a:buNone/>
               <a:defRPr sz="1800" b="0">
                 <a:solidFill>
                   <a:srgbClr val="526B72"/>
@@ -8636,6 +8847,7 @@
               </a:defRPr>
             </a:lvl2pPr>
             <a:lvl3pPr>
+              <a:buNone/>
               <a:defRPr sz="1800" b="0">
                 <a:solidFill>
                   <a:srgbClr val="526B72"/>
@@ -8646,6 +8858,7 @@
               </a:defRPr>
             </a:lvl3pPr>
             <a:lvl4pPr>
+              <a:buNone/>
               <a:defRPr sz="1800" b="0">
                 <a:solidFill>
                   <a:srgbClr val="526B72"/>
@@ -8656,6 +8869,7 @@
               </a:defRPr>
             </a:lvl4pPr>
             <a:lvl5pPr>
+              <a:buNone/>
               <a:defRPr sz="1800" b="0">
                 <a:solidFill>
                   <a:srgbClr val="526B72"/>
@@ -8666,6 +8880,7 @@
               </a:defRPr>
             </a:lvl5pPr>
             <a:lvl6pPr>
+              <a:buNone/>
               <a:defRPr sz="1800" b="0">
                 <a:solidFill>
                   <a:srgbClr val="526B72"/>
@@ -8676,6 +8891,7 @@
               </a:defRPr>
             </a:lvl6pPr>
             <a:lvl7pPr>
+              <a:buNone/>
               <a:defRPr sz="1800" b="0">
                 <a:solidFill>
                   <a:srgbClr val="526B72"/>
@@ -8686,6 +8902,7 @@
               </a:defRPr>
             </a:lvl7pPr>
             <a:lvl8pPr>
+              <a:buNone/>
               <a:defRPr sz="1800" b="0">
                 <a:solidFill>
                   <a:srgbClr val="526B72"/>
@@ -8696,6 +8913,7 @@
               </a:defRPr>
             </a:lvl8pPr>
             <a:lvl9pPr>
+              <a:buNone/>
               <a:defRPr sz="1800" b="0">
                 <a:solidFill>
                   <a:srgbClr val="526B72"/>
@@ -8708,6 +8926,7 @@
           </a:lstStyle>
           <a:p xmlns:a="http://schemas.openxmlformats.org/drawingml/2006/main">
             <a:pPr>
+              <a:buNone/>
               <a:defRPr sz="1800" b="0">
                 <a:solidFill>
                   <a:srgbClr val="526B72"/>
@@ -8731,6 +8950,7 @@
           </a:p>
           <a:p xmlns:a="http://schemas.openxmlformats.org/drawingml/2006/main">
             <a:pPr>
+              <a:buNone/>
               <a:defRPr sz="1800" b="0">
                 <a:solidFill>
                   <a:srgbClr val="526B72"/>
@@ -8826,6 +9046,7 @@
               </a:defRPr>
             </a:defPPr>
             <a:lvl1pPr>
+              <a:buNone/>
               <a:defRPr sz="1350" b="1">
                 <a:solidFill>
                   <a:srgbClr val="83E3CD"/>
@@ -8836,6 +9057,7 @@
               </a:defRPr>
             </a:lvl1pPr>
             <a:lvl2pPr>
+              <a:buNone/>
               <a:defRPr sz="1350" b="1">
                 <a:solidFill>
                   <a:srgbClr val="83E3CD"/>
@@ -8846,6 +9068,7 @@
               </a:defRPr>
             </a:lvl2pPr>
             <a:lvl3pPr>
+              <a:buNone/>
               <a:defRPr sz="1350" b="1">
                 <a:solidFill>
                   <a:srgbClr val="83E3CD"/>
@@ -8856,6 +9079,7 @@
               </a:defRPr>
             </a:lvl3pPr>
             <a:lvl4pPr>
+              <a:buNone/>
               <a:defRPr sz="1350" b="1">
                 <a:solidFill>
                   <a:srgbClr val="83E3CD"/>
@@ -8866,6 +9090,7 @@
               </a:defRPr>
             </a:lvl4pPr>
             <a:lvl5pPr>
+              <a:buNone/>
               <a:defRPr sz="1350" b="1">
                 <a:solidFill>
                   <a:srgbClr val="83E3CD"/>
@@ -8876,6 +9101,7 @@
               </a:defRPr>
             </a:lvl5pPr>
             <a:lvl6pPr>
+              <a:buNone/>
               <a:defRPr sz="1350" b="1">
                 <a:solidFill>
                   <a:srgbClr val="83E3CD"/>
@@ -8886,6 +9112,7 @@
               </a:defRPr>
             </a:lvl6pPr>
             <a:lvl7pPr>
+              <a:buNone/>
               <a:defRPr sz="1350" b="1">
                 <a:solidFill>
                   <a:srgbClr val="83E3CD"/>
@@ -8896,6 +9123,7 @@
               </a:defRPr>
             </a:lvl7pPr>
             <a:lvl8pPr>
+              <a:buNone/>
               <a:defRPr sz="1350" b="1">
                 <a:solidFill>
                   <a:srgbClr val="83E3CD"/>
@@ -8906,6 +9134,7 @@
               </a:defRPr>
             </a:lvl8pPr>
             <a:lvl9pPr>
+              <a:buNone/>
               <a:defRPr sz="1350" b="1">
                 <a:solidFill>
                   <a:srgbClr val="83E3CD"/>
@@ -8918,6 +9147,7 @@
           </a:lstStyle>
           <a:p xmlns:a="http://schemas.openxmlformats.org/drawingml/2006/main">
             <a:pPr>
+              <a:buNone/>
               <a:defRPr sz="1350" b="1">
                 <a:solidFill>
                   <a:srgbClr val="83E3CD"/>
@@ -8984,6 +9214,7 @@
               </a:defRPr>
             </a:defPPr>
             <a:lvl1pPr>
+              <a:buNone/>
               <a:defRPr sz="3300" b="1">
                 <a:solidFill>
                   <a:srgbClr val="F7FAF8"/>
@@ -8994,6 +9225,7 @@
               </a:defRPr>
             </a:lvl1pPr>
             <a:lvl2pPr>
+              <a:buNone/>
               <a:defRPr sz="3300" b="1">
                 <a:solidFill>
                   <a:srgbClr val="F7FAF8"/>
@@ -9004,6 +9236,7 @@
               </a:defRPr>
             </a:lvl2pPr>
             <a:lvl3pPr>
+              <a:buNone/>
               <a:defRPr sz="3300" b="1">
                 <a:solidFill>
                   <a:srgbClr val="F7FAF8"/>
@@ -9014,6 +9247,7 @@
               </a:defRPr>
             </a:lvl3pPr>
             <a:lvl4pPr>
+              <a:buNone/>
               <a:defRPr sz="3300" b="1">
                 <a:solidFill>
                   <a:srgbClr val="F7FAF8"/>
@@ -9024,6 +9258,7 @@
               </a:defRPr>
             </a:lvl4pPr>
             <a:lvl5pPr>
+              <a:buNone/>
               <a:defRPr sz="3300" b="1">
                 <a:solidFill>
                   <a:srgbClr val="F7FAF8"/>
@@ -9034,6 +9269,7 @@
               </a:defRPr>
             </a:lvl5pPr>
             <a:lvl6pPr>
+              <a:buNone/>
               <a:defRPr sz="3300" b="1">
                 <a:solidFill>
                   <a:srgbClr val="F7FAF8"/>
@@ -9044,6 +9280,7 @@
               </a:defRPr>
             </a:lvl6pPr>
             <a:lvl7pPr>
+              <a:buNone/>
               <a:defRPr sz="3300" b="1">
                 <a:solidFill>
                   <a:srgbClr val="F7FAF8"/>
@@ -9054,6 +9291,7 @@
               </a:defRPr>
             </a:lvl7pPr>
             <a:lvl8pPr>
+              <a:buNone/>
               <a:defRPr sz="3300" b="1">
                 <a:solidFill>
                   <a:srgbClr val="F7FAF8"/>
@@ -9064,6 +9302,7 @@
               </a:defRPr>
             </a:lvl8pPr>
             <a:lvl9pPr>
+              <a:buNone/>
               <a:defRPr sz="3300" b="1">
                 <a:solidFill>
                   <a:srgbClr val="F7FAF8"/>
@@ -9076,6 +9315,7 @@
           </a:lstStyle>
           <a:p xmlns:a="http://schemas.openxmlformats.org/drawingml/2006/main">
             <a:pPr>
+              <a:buNone/>
               <a:defRPr sz="3300" b="1">
                 <a:solidFill>
                   <a:srgbClr val="F7FAF8"/>
@@ -9094,7 +9334,7 @@
                 <a:ea typeface="Arial"/>
                 <a:cs typeface="Arial"/>
               </a:rPr>
-              <a:t>O contrato bloqueou o lote inválido</a:t>
+              <a:t>Lote válido: 5.810 predições concluídas</a:t>
             </a:r>
           </a:p>
         </p:txBody>
@@ -9142,6 +9382,7 @@
               </a:defRPr>
             </a:defPPr>
             <a:lvl1pPr>
+              <a:buNone/>
               <a:defRPr sz="1200" b="0">
                 <a:solidFill>
                   <a:srgbClr val="B9CFD2"/>
@@ -9152,6 +9393,7 @@
               </a:defRPr>
             </a:lvl1pPr>
             <a:lvl2pPr>
+              <a:buNone/>
               <a:defRPr sz="1200" b="0">
                 <a:solidFill>
                   <a:srgbClr val="B9CFD2"/>
@@ -9162,6 +9404,7 @@
               </a:defRPr>
             </a:lvl2pPr>
             <a:lvl3pPr>
+              <a:buNone/>
               <a:defRPr sz="1200" b="0">
                 <a:solidFill>
                   <a:srgbClr val="B9CFD2"/>
@@ -9172,6 +9415,7 @@
               </a:defRPr>
             </a:lvl3pPr>
             <a:lvl4pPr>
+              <a:buNone/>
               <a:defRPr sz="1200" b="0">
                 <a:solidFill>
                   <a:srgbClr val="B9CFD2"/>
@@ -9182,6 +9426,7 @@
               </a:defRPr>
             </a:lvl4pPr>
             <a:lvl5pPr>
+              <a:buNone/>
               <a:defRPr sz="1200" b="0">
                 <a:solidFill>
                   <a:srgbClr val="B9CFD2"/>
@@ -9192,6 +9437,7 @@
               </a:defRPr>
             </a:lvl5pPr>
             <a:lvl6pPr>
+              <a:buNone/>
               <a:defRPr sz="1200" b="0">
                 <a:solidFill>
                   <a:srgbClr val="B9CFD2"/>
@@ -9202,6 +9448,7 @@
               </a:defRPr>
             </a:lvl6pPr>
             <a:lvl7pPr>
+              <a:buNone/>
               <a:defRPr sz="1200" b="0">
                 <a:solidFill>
                   <a:srgbClr val="B9CFD2"/>
@@ -9212,6 +9459,7 @@
               </a:defRPr>
             </a:lvl7pPr>
             <a:lvl8pPr>
+              <a:buNone/>
               <a:defRPr sz="1200" b="0">
                 <a:solidFill>
                   <a:srgbClr val="B9CFD2"/>
@@ -9222,6 +9470,7 @@
               </a:defRPr>
             </a:lvl8pPr>
             <a:lvl9pPr>
+              <a:buNone/>
               <a:defRPr sz="1200" b="0">
                 <a:solidFill>
                   <a:srgbClr val="B9CFD2"/>
@@ -9234,6 +9483,7 @@
           </a:lstStyle>
           <a:p xmlns:a="http://schemas.openxmlformats.org/drawingml/2006/main">
             <a:pPr>
+              <a:buNone/>
               <a:defRPr sz="1200" b="0">
                 <a:solidFill>
                   <a:srgbClr val="B9CFD2"/>
@@ -9300,6 +9550,7 @@
               </a:defRPr>
             </a:defPPr>
             <a:lvl1pPr>
+              <a:buNone/>
               <a:defRPr sz="1350" b="1">
                 <a:solidFill>
                   <a:srgbClr val="83E3CD"/>
@@ -9310,6 +9561,7 @@
               </a:defRPr>
             </a:lvl1pPr>
             <a:lvl2pPr>
+              <a:buNone/>
               <a:defRPr sz="1350" b="1">
                 <a:solidFill>
                   <a:srgbClr val="83E3CD"/>
@@ -9320,6 +9572,7 @@
               </a:defRPr>
             </a:lvl2pPr>
             <a:lvl3pPr>
+              <a:buNone/>
               <a:defRPr sz="1350" b="1">
                 <a:solidFill>
                   <a:srgbClr val="83E3CD"/>
@@ -9330,6 +9583,7 @@
               </a:defRPr>
             </a:lvl3pPr>
             <a:lvl4pPr>
+              <a:buNone/>
               <a:defRPr sz="1350" b="1">
                 <a:solidFill>
                   <a:srgbClr val="83E3CD"/>
@@ -9340,6 +9594,7 @@
               </a:defRPr>
             </a:lvl4pPr>
             <a:lvl5pPr>
+              <a:buNone/>
               <a:defRPr sz="1350" b="1">
                 <a:solidFill>
                   <a:srgbClr val="83E3CD"/>
@@ -9350,6 +9605,7 @@
               </a:defRPr>
             </a:lvl5pPr>
             <a:lvl6pPr>
+              <a:buNone/>
               <a:defRPr sz="1350" b="1">
                 <a:solidFill>
                   <a:srgbClr val="83E3CD"/>
@@ -9360,6 +9616,7 @@
               </a:defRPr>
             </a:lvl6pPr>
             <a:lvl7pPr>
+              <a:buNone/>
               <a:defRPr sz="1350" b="1">
                 <a:solidFill>
                   <a:srgbClr val="83E3CD"/>
@@ -9370,6 +9627,7 @@
               </a:defRPr>
             </a:lvl7pPr>
             <a:lvl8pPr>
+              <a:buNone/>
               <a:defRPr sz="1350" b="1">
                 <a:solidFill>
                   <a:srgbClr val="83E3CD"/>
@@ -9380,6 +9638,7 @@
               </a:defRPr>
             </a:lvl8pPr>
             <a:lvl9pPr>
+              <a:buNone/>
               <a:defRPr sz="1350" b="1">
                 <a:solidFill>
                   <a:srgbClr val="83E3CD"/>
@@ -9392,6 +9651,7 @@
           </a:lstStyle>
           <a:p xmlns:a="http://schemas.openxmlformats.org/drawingml/2006/main">
             <a:pPr>
+              <a:buNone/>
               <a:defRPr sz="1350" b="1">
                 <a:solidFill>
                   <a:srgbClr val="83E3CD"/>
@@ -9458,6 +9718,7 @@
               </a:defRPr>
             </a:defPPr>
             <a:lvl1pPr>
+              <a:buNone/>
               <a:defRPr sz="5850" b="1">
                 <a:solidFill>
                   <a:srgbClr val="83E3CD"/>
@@ -9468,6 +9729,7 @@
               </a:defRPr>
             </a:lvl1pPr>
             <a:lvl2pPr>
+              <a:buNone/>
               <a:defRPr sz="5850" b="1">
                 <a:solidFill>
                   <a:srgbClr val="83E3CD"/>
@@ -9478,6 +9740,7 @@
               </a:defRPr>
             </a:lvl2pPr>
             <a:lvl3pPr>
+              <a:buNone/>
               <a:defRPr sz="5850" b="1">
                 <a:solidFill>
                   <a:srgbClr val="83E3CD"/>
@@ -9488,6 +9751,7 @@
               </a:defRPr>
             </a:lvl3pPr>
             <a:lvl4pPr>
+              <a:buNone/>
               <a:defRPr sz="5850" b="1">
                 <a:solidFill>
                   <a:srgbClr val="83E3CD"/>
@@ -9498,6 +9762,7 @@
               </a:defRPr>
             </a:lvl4pPr>
             <a:lvl5pPr>
+              <a:buNone/>
               <a:defRPr sz="5850" b="1">
                 <a:solidFill>
                   <a:srgbClr val="83E3CD"/>
@@ -9508,6 +9773,7 @@
               </a:defRPr>
             </a:lvl5pPr>
             <a:lvl6pPr>
+              <a:buNone/>
               <a:defRPr sz="5850" b="1">
                 <a:solidFill>
                   <a:srgbClr val="83E3CD"/>
@@ -9518,6 +9784,7 @@
               </a:defRPr>
             </a:lvl6pPr>
             <a:lvl7pPr>
+              <a:buNone/>
               <a:defRPr sz="5850" b="1">
                 <a:solidFill>
                   <a:srgbClr val="83E3CD"/>
@@ -9528,6 +9795,7 @@
               </a:defRPr>
             </a:lvl7pPr>
             <a:lvl8pPr>
+              <a:buNone/>
               <a:defRPr sz="5850" b="1">
                 <a:solidFill>
                   <a:srgbClr val="83E3CD"/>
@@ -9538,6 +9806,7 @@
               </a:defRPr>
             </a:lvl8pPr>
             <a:lvl9pPr>
+              <a:buNone/>
               <a:defRPr sz="5850" b="1">
                 <a:solidFill>
                   <a:srgbClr val="83E3CD"/>
@@ -9550,6 +9819,7 @@
           </a:lstStyle>
           <a:p xmlns:a="http://schemas.openxmlformats.org/drawingml/2006/main">
             <a:pPr>
+              <a:buNone/>
               <a:defRPr sz="5850" b="1">
                 <a:solidFill>
                   <a:srgbClr val="83E3CD"/>
@@ -9590,7 +9860,7 @@
         <p:spPr>
           <a:xfrm xmlns:a="http://schemas.openxmlformats.org/drawingml/2006/main">
             <a:off x="647700" y="2924175"/>
-            <a:ext cx="4476750" cy="409575"/>
+            <a:ext cx="3286125" cy="523875"/>
           </a:xfrm>
           <a:prstGeom xmlns:a="http://schemas.openxmlformats.org/drawingml/2006/main" prst="rect">
             <a:avLst/>
@@ -9616,6 +9886,7 @@
               </a:defRPr>
             </a:defPPr>
             <a:lvl1pPr>
+              <a:buNone/>
               <a:defRPr sz="2250" b="0">
                 <a:solidFill>
                   <a:srgbClr val="F7FAF8"/>
@@ -9626,6 +9897,7 @@
               </a:defRPr>
             </a:lvl1pPr>
             <a:lvl2pPr>
+              <a:buNone/>
               <a:defRPr sz="2250" b="0">
                 <a:solidFill>
                   <a:srgbClr val="F7FAF8"/>
@@ -9636,6 +9908,7 @@
               </a:defRPr>
             </a:lvl2pPr>
             <a:lvl3pPr>
+              <a:buNone/>
               <a:defRPr sz="2250" b="0">
                 <a:solidFill>
                   <a:srgbClr val="F7FAF8"/>
@@ -9646,6 +9919,7 @@
               </a:defRPr>
             </a:lvl3pPr>
             <a:lvl4pPr>
+              <a:buNone/>
               <a:defRPr sz="2250" b="0">
                 <a:solidFill>
                   <a:srgbClr val="F7FAF8"/>
@@ -9656,6 +9930,7 @@
               </a:defRPr>
             </a:lvl4pPr>
             <a:lvl5pPr>
+              <a:buNone/>
               <a:defRPr sz="2250" b="0">
                 <a:solidFill>
                   <a:srgbClr val="F7FAF8"/>
@@ -9666,6 +9941,7 @@
               </a:defRPr>
             </a:lvl5pPr>
             <a:lvl6pPr>
+              <a:buNone/>
               <a:defRPr sz="2250" b="0">
                 <a:solidFill>
                   <a:srgbClr val="F7FAF8"/>
@@ -9676,6 +9952,7 @@
               </a:defRPr>
             </a:lvl6pPr>
             <a:lvl7pPr>
+              <a:buNone/>
               <a:defRPr sz="2250" b="0">
                 <a:solidFill>
                   <a:srgbClr val="F7FAF8"/>
@@ -9686,6 +9963,7 @@
               </a:defRPr>
             </a:lvl7pPr>
             <a:lvl8pPr>
+              <a:buNone/>
               <a:defRPr sz="2250" b="0">
                 <a:solidFill>
                   <a:srgbClr val="F7FAF8"/>
@@ -9696,6 +9974,7 @@
               </a:defRPr>
             </a:lvl8pPr>
             <a:lvl9pPr>
+              <a:buNone/>
               <a:defRPr sz="2250" b="0">
                 <a:solidFill>
                   <a:srgbClr val="F7FAF8"/>
@@ -9708,6 +9987,7 @@
           </a:lstStyle>
           <a:p xmlns:a="http://schemas.openxmlformats.org/drawingml/2006/main">
             <a:pPr>
+              <a:buNone/>
               <a:defRPr sz="2250" b="0">
                 <a:solidFill>
                   <a:srgbClr val="F7FAF8"/>
@@ -9726,7 +10006,7 @@
                 <a:ea typeface="Arial"/>
                 <a:cs typeface="Arial"/>
               </a:rPr>
-              <a:t>registros rejeitados</a:t>
+              <a:t>predições concluídas</a:t>
             </a:r>
           </a:p>
         </p:txBody>
@@ -9747,8 +10027,8 @@
         </p:nvSpPr>
         <p:spPr>
           <a:xfrm xmlns:a="http://schemas.openxmlformats.org/drawingml/2006/main">
-            <a:off x="609600" y="3714750"/>
-            <a:ext cx="4572000" cy="666750"/>
+            <a:off x="609600" y="3667125"/>
+            <a:ext cx="3143250" cy="1066800"/>
           </a:xfrm>
           <a:prstGeom xmlns:a="http://schemas.openxmlformats.org/drawingml/2006/main" prst="rect">
             <a:avLst/>
@@ -9764,7 +10044,7 @@
           </a:bodyPr>
           <a:lstStyle xmlns:a="http://schemas.openxmlformats.org/drawingml/2006/main">
             <a:defPPr>
-              <a:defRPr sz="3900" b="1">
+              <a:defRPr sz="3300" b="1">
                 <a:solidFill>
                   <a:srgbClr val="F7FAF8"/>
                 </a:solidFill>
@@ -9774,6 +10054,7 @@
               </a:defRPr>
             </a:defPPr>
             <a:lvl1pPr>
+              <a:buNone/>
               <a:defRPr sz="3900" b="1">
                 <a:solidFill>
                   <a:srgbClr val="F7FAF8"/>
@@ -9784,6 +10065,7 @@
               </a:defRPr>
             </a:lvl1pPr>
             <a:lvl2pPr>
+              <a:buNone/>
               <a:defRPr sz="3900" b="1">
                 <a:solidFill>
                   <a:srgbClr val="F7FAF8"/>
@@ -9794,6 +10076,7 @@
               </a:defRPr>
             </a:lvl2pPr>
             <a:lvl3pPr>
+              <a:buNone/>
               <a:defRPr sz="3900" b="1">
                 <a:solidFill>
                   <a:srgbClr val="F7FAF8"/>
@@ -9804,6 +10087,7 @@
               </a:defRPr>
             </a:lvl3pPr>
             <a:lvl4pPr>
+              <a:buNone/>
               <a:defRPr sz="3900" b="1">
                 <a:solidFill>
                   <a:srgbClr val="F7FAF8"/>
@@ -9814,6 +10098,7 @@
               </a:defRPr>
             </a:lvl4pPr>
             <a:lvl5pPr>
+              <a:buNone/>
               <a:defRPr sz="3900" b="1">
                 <a:solidFill>
                   <a:srgbClr val="F7FAF8"/>
@@ -9824,6 +10109,7 @@
               </a:defRPr>
             </a:lvl5pPr>
             <a:lvl6pPr>
+              <a:buNone/>
               <a:defRPr sz="3900" b="1">
                 <a:solidFill>
                   <a:srgbClr val="F7FAF8"/>
@@ -9834,6 +10120,7 @@
               </a:defRPr>
             </a:lvl6pPr>
             <a:lvl7pPr>
+              <a:buNone/>
               <a:defRPr sz="3900" b="1">
                 <a:solidFill>
                   <a:srgbClr val="F7FAF8"/>
@@ -9844,6 +10131,7 @@
               </a:defRPr>
             </a:lvl7pPr>
             <a:lvl8pPr>
+              <a:buNone/>
               <a:defRPr sz="3900" b="1">
                 <a:solidFill>
                   <a:srgbClr val="F7FAF8"/>
@@ -9854,6 +10142,7 @@
               </a:defRPr>
             </a:lvl8pPr>
             <a:lvl9pPr>
+              <a:buNone/>
               <a:defRPr sz="3900" b="1">
                 <a:solidFill>
                   <a:srgbClr val="F7FAF8"/>
@@ -9866,7 +10155,8 @@
           </a:lstStyle>
           <a:p xmlns:a="http://schemas.openxmlformats.org/drawingml/2006/main">
             <a:pPr>
-              <a:defRPr sz="3900" b="1">
+              <a:buNone/>
+              <a:defRPr sz="3300" b="1">
                 <a:solidFill>
                   <a:srgbClr val="F7FAF8"/>
                 </a:solidFill>
@@ -9876,7 +10166,7 @@
               </a:defRPr>
             </a:pPr>
             <a:r>
-              <a:rPr sz="3900" b="1">
+              <a:rPr sz="3300" b="1">
                 <a:solidFill>
                   <a:srgbClr val="F7FAF8"/>
                 </a:solidFill>
@@ -9884,7 +10174,31 @@
                 <a:ea typeface="Arial"/>
                 <a:cs typeface="Arial"/>
               </a:rPr>
-              <a:t>0 predições</a:t>
+              <a:t>ROC-AUC</a:t>
+            </a:r>
+          </a:p>
+          <a:p xmlns:a="http://schemas.openxmlformats.org/drawingml/2006/main">
+            <a:pPr>
+              <a:buNone/>
+              <a:defRPr sz="3300" b="1">
+                <a:solidFill>
+                  <a:srgbClr val="F7FAF8"/>
+                </a:solidFill>
+                <a:latin typeface="Arial"/>
+                <a:ea typeface="Arial"/>
+                <a:cs typeface="Arial"/>
+              </a:defRPr>
+            </a:pPr>
+            <a:r>
+              <a:rPr sz="3300" b="1">
+                <a:solidFill>
+                  <a:srgbClr val="F7FAF8"/>
+                </a:solidFill>
+                <a:latin typeface="Arial"/>
+                <a:ea typeface="Arial"/>
+                <a:cs typeface="Arial"/>
+              </a:rPr>
+              <a:t>0,771</a:t>
             </a:r>
           </a:p>
         </p:txBody>
@@ -9905,8 +10219,8 @@
         </p:nvSpPr>
         <p:spPr>
           <a:xfrm xmlns:a="http://schemas.openxmlformats.org/drawingml/2006/main">
-            <a:off x="647700" y="4714875"/>
-            <a:ext cx="4714875" cy="1104900"/>
+            <a:off x="647700" y="5095875"/>
+            <a:ext cx="3238500" cy="742950"/>
           </a:xfrm>
           <a:prstGeom xmlns:a="http://schemas.openxmlformats.org/drawingml/2006/main" prst="rect">
             <a:avLst/>
@@ -9922,7 +10236,7 @@
           </a:bodyPr>
           <a:lstStyle xmlns:a="http://schemas.openxmlformats.org/drawingml/2006/main">
             <a:defPPr>
-              <a:defRPr sz="1875" b="0">
+              <a:defRPr sz="1800" b="0">
                 <a:solidFill>
                   <a:srgbClr val="B9CFD2"/>
                 </a:solidFill>
@@ -9932,6 +10246,7 @@
               </a:defRPr>
             </a:defPPr>
             <a:lvl1pPr>
+              <a:buNone/>
               <a:defRPr sz="1875" b="0">
                 <a:solidFill>
                   <a:srgbClr val="B9CFD2"/>
@@ -9942,6 +10257,7 @@
               </a:defRPr>
             </a:lvl1pPr>
             <a:lvl2pPr>
+              <a:buNone/>
               <a:defRPr sz="1875" b="0">
                 <a:solidFill>
                   <a:srgbClr val="B9CFD2"/>
@@ -9952,6 +10268,7 @@
               </a:defRPr>
             </a:lvl2pPr>
             <a:lvl3pPr>
+              <a:buNone/>
               <a:defRPr sz="1875" b="0">
                 <a:solidFill>
                   <a:srgbClr val="B9CFD2"/>
@@ -9962,6 +10279,7 @@
               </a:defRPr>
             </a:lvl3pPr>
             <a:lvl4pPr>
+              <a:buNone/>
               <a:defRPr sz="1875" b="0">
                 <a:solidFill>
                   <a:srgbClr val="B9CFD2"/>
@@ -9972,6 +10290,7 @@
               </a:defRPr>
             </a:lvl4pPr>
             <a:lvl5pPr>
+              <a:buNone/>
               <a:defRPr sz="1875" b="0">
                 <a:solidFill>
                   <a:srgbClr val="B9CFD2"/>
@@ -9982,6 +10301,7 @@
               </a:defRPr>
             </a:lvl5pPr>
             <a:lvl6pPr>
+              <a:buNone/>
               <a:defRPr sz="1875" b="0">
                 <a:solidFill>
                   <a:srgbClr val="B9CFD2"/>
@@ -9992,6 +10312,7 @@
               </a:defRPr>
             </a:lvl6pPr>
             <a:lvl7pPr>
+              <a:buNone/>
               <a:defRPr sz="1875" b="0">
                 <a:solidFill>
                   <a:srgbClr val="B9CFD2"/>
@@ -10002,6 +10323,7 @@
               </a:defRPr>
             </a:lvl7pPr>
             <a:lvl8pPr>
+              <a:buNone/>
               <a:defRPr sz="1875" b="0">
                 <a:solidFill>
                   <a:srgbClr val="B9CFD2"/>
@@ -10012,6 +10334,7 @@
               </a:defRPr>
             </a:lvl8pPr>
             <a:lvl9pPr>
+              <a:buNone/>
               <a:defRPr sz="1875" b="0">
                 <a:solidFill>
                   <a:srgbClr val="B9CFD2"/>
@@ -10024,7 +10347,8 @@
           </a:lstStyle>
           <a:p xmlns:a="http://schemas.openxmlformats.org/drawingml/2006/main">
             <a:pPr>
-              <a:defRPr sz="1875" b="0">
+              <a:buNone/>
+              <a:defRPr sz="1800" b="0">
                 <a:solidFill>
                   <a:srgbClr val="B9CFD2"/>
                 </a:solidFill>
@@ -10034,7 +10358,7 @@
               </a:defRPr>
             </a:pPr>
             <a:r>
-              <a:rPr sz="1875" b="0">
+              <a:rPr sz="1800" b="0">
                 <a:solidFill>
                   <a:srgbClr val="B9CFD2"/>
                 </a:solidFill>
@@ -10042,12 +10366,13 @@
                 <a:ea typeface="Arial"/>
                 <a:cs typeface="Arial"/>
               </a:rPr>
-              <a:t>ID único e positivo</a:t>
+              <a:t>0 registros rejeitados</a:t>
             </a:r>
           </a:p>
           <a:p xmlns:a="http://schemas.openxmlformats.org/drawingml/2006/main">
             <a:pPr>
-              <a:defRPr sz="1875" b="0">
+              <a:buNone/>
+              <a:defRPr sz="1800" b="0">
                 <a:solidFill>
                   <a:srgbClr val="B9CFD2"/>
                 </a:solidFill>
@@ -10057,7 +10382,7 @@
               </a:defRPr>
             </a:pPr>
             <a:r>
-              <a:rPr sz="1875" b="0">
+              <a:rPr sz="1800" b="0">
                 <a:solidFill>
                   <a:srgbClr val="B9CFD2"/>
                 </a:solidFill>
@@ -10065,30 +10390,7 @@
                 <a:ea typeface="Arial"/>
                 <a:cs typeface="Arial"/>
               </a:rPr>
-              <a:t>Idade entre 18 e 120 anos</a:t>
-            </a:r>
-          </a:p>
-          <a:p xmlns:a="http://schemas.openxmlformats.org/drawingml/2006/main">
-            <a:pPr>
-              <a:defRPr sz="1875" b="0">
-                <a:solidFill>
-                  <a:srgbClr val="B9CFD2"/>
-                </a:solidFill>
-                <a:latin typeface="Arial"/>
-                <a:ea typeface="Arial"/>
-                <a:cs typeface="Arial"/>
-              </a:defRPr>
-            </a:pPr>
-            <a:r>
-              <a:rPr sz="1875" b="0">
-                <a:solidFill>
-                  <a:srgbClr val="B9CFD2"/>
-                </a:solidFill>
-                <a:latin typeface="Arial"/>
-                <a:ea typeface="Arial"/>
-                <a:cs typeface="Arial"/>
-              </a:rPr>
-              <a:t>Limite de crédito maior que zero</a:t>
+              <a:t>0 alertas de drift</a:t>
             </a:r>
           </a:p>
         </p:txBody>
@@ -10098,7 +10400,7 @@
           <p:cNvPr id="9" name="">
             <a:extLst xmlns:a="http://schemas.openxmlformats.org/drawingml/2006/main">
               <a:ext uri="{FF2B5EF4-FFF2-40B4-BE49-F238E27FC236}">
-                <a16:creationId xmlns:a16="http://schemas.microsoft.com/office/drawing/2014/main" id="{010F3BC8-EEE1-4D05-8072-C805B2102DA1}"/>
+                <a16:creationId xmlns:a16="http://schemas.microsoft.com/office/drawing/2014/main" id="{F16DD296-3A44-4FAB-BD55-2DF11370FC99}"/>
               </a:ext>
             </a:extLst>
           </p:cNvPr>
@@ -10108,13 +10410,14 @@
           <p:nvPr/>
         </p:nvPicPr>
         <p:blipFill>
-          <a:blip xmlns:r="http://schemas.openxmlformats.org/officeDocument/2006/relationships" xmlns:a="http://schemas.openxmlformats.org/drawingml/2006/main" r:embed="R340b065df318418a"/>
+          <a:blip xmlns:r="http://schemas.openxmlformats.org/officeDocument/2006/relationships" xmlns:a="http://schemas.openxmlformats.org/drawingml/2006/main" r:embed="Raf7aa3f4bdf44801"/>
+          <a:srcRect xmlns:a="http://schemas.openxmlformats.org/drawingml/2006/main" l="15470" t="0" r="0" b="26670"/>
           <a:stretch xmlns:a="http://schemas.openxmlformats.org/drawingml/2006/main"/>
         </p:blipFill>
         <p:spPr>
           <a:xfrm xmlns:a="http://schemas.openxmlformats.org/drawingml/2006/main">
-            <a:off x="5823747" y="1857375"/>
-            <a:ext cx="5554656" cy="4143375"/>
+            <a:off x="4038600" y="1876425"/>
+            <a:ext cx="7543800" cy="3943350"/>
           </a:xfrm>
           <a:prstGeom xmlns:a="http://schemas.openxmlformats.org/drawingml/2006/main" prst="rect">
             <a:avLst/>
@@ -10137,8 +10440,8 @@
         </p:nvSpPr>
         <p:spPr>
           <a:xfrm xmlns:a="http://schemas.openxmlformats.org/drawingml/2006/main">
-            <a:off x="5638800" y="6124575"/>
-            <a:ext cx="5924550" cy="228600"/>
+            <a:off x="609600" y="6096000"/>
+            <a:ext cx="10972800" cy="266700"/>
           </a:xfrm>
           <a:prstGeom xmlns:a="http://schemas.openxmlformats.org/drawingml/2006/main" prst="rect">
             <a:avLst/>
@@ -10154,7 +10457,7 @@
           </a:bodyPr>
           <a:lstStyle xmlns:a="http://schemas.openxmlformats.org/drawingml/2006/main">
             <a:defPPr>
-              <a:defRPr sz="1350" b="0">
+              <a:defRPr sz="1575" b="0">
                 <a:solidFill>
                   <a:srgbClr val="83E3CD"/>
                 </a:solidFill>
@@ -10164,6 +10467,7 @@
               </a:defRPr>
             </a:defPPr>
             <a:lvl1pPr>
+              <a:buNone/>
               <a:defRPr sz="1350" b="0">
                 <a:solidFill>
                   <a:srgbClr val="83E3CD"/>
@@ -10174,6 +10478,7 @@
               </a:defRPr>
             </a:lvl1pPr>
             <a:lvl2pPr>
+              <a:buNone/>
               <a:defRPr sz="1350" b="0">
                 <a:solidFill>
                   <a:srgbClr val="83E3CD"/>
@@ -10184,6 +10489,7 @@
               </a:defRPr>
             </a:lvl2pPr>
             <a:lvl3pPr>
+              <a:buNone/>
               <a:defRPr sz="1350" b="0">
                 <a:solidFill>
                   <a:srgbClr val="83E3CD"/>
@@ -10194,6 +10500,7 @@
               </a:defRPr>
             </a:lvl3pPr>
             <a:lvl4pPr>
+              <a:buNone/>
               <a:defRPr sz="1350" b="0">
                 <a:solidFill>
                   <a:srgbClr val="83E3CD"/>
@@ -10204,6 +10511,7 @@
               </a:defRPr>
             </a:lvl4pPr>
             <a:lvl5pPr>
+              <a:buNone/>
               <a:defRPr sz="1350" b="0">
                 <a:solidFill>
                   <a:srgbClr val="83E3CD"/>
@@ -10214,6 +10522,7 @@
               </a:defRPr>
             </a:lvl5pPr>
             <a:lvl6pPr>
+              <a:buNone/>
               <a:defRPr sz="1350" b="0">
                 <a:solidFill>
                   <a:srgbClr val="83E3CD"/>
@@ -10224,6 +10533,7 @@
               </a:defRPr>
             </a:lvl6pPr>
             <a:lvl7pPr>
+              <a:buNone/>
               <a:defRPr sz="1350" b="0">
                 <a:solidFill>
                   <a:srgbClr val="83E3CD"/>
@@ -10234,6 +10544,7 @@
               </a:defRPr>
             </a:lvl7pPr>
             <a:lvl8pPr>
+              <a:buNone/>
               <a:defRPr sz="1350" b="0">
                 <a:solidFill>
                   <a:srgbClr val="83E3CD"/>
@@ -10244,6 +10555,7 @@
               </a:defRPr>
             </a:lvl8pPr>
             <a:lvl9pPr>
+              <a:buNone/>
               <a:defRPr sz="1350" b="0">
                 <a:solidFill>
                   <a:srgbClr val="83E3CD"/>
@@ -10256,7 +10568,8 @@
           </a:lstStyle>
           <a:p xmlns:a="http://schemas.openxmlformats.org/drawingml/2006/main">
             <a:pPr>
-              <a:defRPr sz="1350" b="0">
+              <a:buNone/>
+              <a:defRPr sz="1575" b="0">
                 <a:solidFill>
                   <a:srgbClr val="83E3CD"/>
                 </a:solidFill>
@@ -10266,7 +10579,7 @@
               </a:defRPr>
             </a:pPr>
             <a:r>
-              <a:rPr sz="1350" b="0">
+              <a:rPr sz="1575" b="0">
                 <a:solidFill>
                   <a:srgbClr val="83E3CD"/>
                 </a:solidFill>
@@ -10274,7 +10587,7 @@
                 <a:ea typeface="Arial"/>
                 <a:cs typeface="Arial"/>
               </a:rPr>
-              <a:t>“Failed” é o resultado esperado da rejeição.</a:t>
+              <a:t>Teste separado: erros propositais bloqueiam o lote inválido.</a:t>
             </a:r>
           </a:p>
         </p:txBody>
@@ -10351,6 +10664,7 @@
               </a:defRPr>
             </a:defPPr>
             <a:lvl1pPr>
+              <a:buNone/>
               <a:defRPr sz="1350" b="1">
                 <a:solidFill>
                   <a:srgbClr val="83E3CD"/>
@@ -10361,6 +10675,7 @@
               </a:defRPr>
             </a:lvl1pPr>
             <a:lvl2pPr>
+              <a:buNone/>
               <a:defRPr sz="1350" b="1">
                 <a:solidFill>
                   <a:srgbClr val="83E3CD"/>
@@ -10371,6 +10686,7 @@
               </a:defRPr>
             </a:lvl2pPr>
             <a:lvl3pPr>
+              <a:buNone/>
               <a:defRPr sz="1350" b="1">
                 <a:solidFill>
                   <a:srgbClr val="83E3CD"/>
@@ -10381,6 +10697,7 @@
               </a:defRPr>
             </a:lvl3pPr>
             <a:lvl4pPr>
+              <a:buNone/>
               <a:defRPr sz="1350" b="1">
                 <a:solidFill>
                   <a:srgbClr val="83E3CD"/>
@@ -10391,6 +10708,7 @@
               </a:defRPr>
             </a:lvl4pPr>
             <a:lvl5pPr>
+              <a:buNone/>
               <a:defRPr sz="1350" b="1">
                 <a:solidFill>
                   <a:srgbClr val="83E3CD"/>
@@ -10401,6 +10719,7 @@
               </a:defRPr>
             </a:lvl5pPr>
             <a:lvl6pPr>
+              <a:buNone/>
               <a:defRPr sz="1350" b="1">
                 <a:solidFill>
                   <a:srgbClr val="83E3CD"/>
@@ -10411,6 +10730,7 @@
               </a:defRPr>
             </a:lvl6pPr>
             <a:lvl7pPr>
+              <a:buNone/>
               <a:defRPr sz="1350" b="1">
                 <a:solidFill>
                   <a:srgbClr val="83E3CD"/>
@@ -10421,6 +10741,7 @@
               </a:defRPr>
             </a:lvl7pPr>
             <a:lvl8pPr>
+              <a:buNone/>
               <a:defRPr sz="1350" b="1">
                 <a:solidFill>
                   <a:srgbClr val="83E3CD"/>
@@ -10431,6 +10752,7 @@
               </a:defRPr>
             </a:lvl8pPr>
             <a:lvl9pPr>
+              <a:buNone/>
               <a:defRPr sz="1350" b="1">
                 <a:solidFill>
                   <a:srgbClr val="83E3CD"/>
@@ -10443,6 +10765,7 @@
           </a:lstStyle>
           <a:p xmlns:a="http://schemas.openxmlformats.org/drawingml/2006/main">
             <a:pPr>
+              <a:buNone/>
               <a:defRPr sz="1350" b="1">
                 <a:solidFill>
                   <a:srgbClr val="83E3CD"/>
@@ -10509,6 +10832,7 @@
               </a:defRPr>
             </a:defPPr>
             <a:lvl1pPr>
+              <a:buNone/>
               <a:defRPr sz="3300" b="1">
                 <a:solidFill>
                   <a:srgbClr val="F7FAF8"/>
@@ -10519,6 +10843,7 @@
               </a:defRPr>
             </a:lvl1pPr>
             <a:lvl2pPr>
+              <a:buNone/>
               <a:defRPr sz="3300" b="1">
                 <a:solidFill>
                   <a:srgbClr val="F7FAF8"/>
@@ -10529,6 +10854,7 @@
               </a:defRPr>
             </a:lvl2pPr>
             <a:lvl3pPr>
+              <a:buNone/>
               <a:defRPr sz="3300" b="1">
                 <a:solidFill>
                   <a:srgbClr val="F7FAF8"/>
@@ -10539,6 +10865,7 @@
               </a:defRPr>
             </a:lvl3pPr>
             <a:lvl4pPr>
+              <a:buNone/>
               <a:defRPr sz="3300" b="1">
                 <a:solidFill>
                   <a:srgbClr val="F7FAF8"/>
@@ -10549,6 +10876,7 @@
               </a:defRPr>
             </a:lvl4pPr>
             <a:lvl5pPr>
+              <a:buNone/>
               <a:defRPr sz="3300" b="1">
                 <a:solidFill>
                   <a:srgbClr val="F7FAF8"/>
@@ -10559,6 +10887,7 @@
               </a:defRPr>
             </a:lvl5pPr>
             <a:lvl6pPr>
+              <a:buNone/>
               <a:defRPr sz="3300" b="1">
                 <a:solidFill>
                   <a:srgbClr val="F7FAF8"/>
@@ -10569,6 +10898,7 @@
               </a:defRPr>
             </a:lvl6pPr>
             <a:lvl7pPr>
+              <a:buNone/>
               <a:defRPr sz="3300" b="1">
                 <a:solidFill>
                   <a:srgbClr val="F7FAF8"/>
@@ -10579,6 +10909,7 @@
               </a:defRPr>
             </a:lvl7pPr>
             <a:lvl8pPr>
+              <a:buNone/>
               <a:defRPr sz="3300" b="1">
                 <a:solidFill>
                   <a:srgbClr val="F7FAF8"/>
@@ -10589,6 +10920,7 @@
               </a:defRPr>
             </a:lvl8pPr>
             <a:lvl9pPr>
+              <a:buNone/>
               <a:defRPr sz="3300" b="1">
                 <a:solidFill>
                   <a:srgbClr val="F7FAF8"/>
@@ -10601,6 +10933,7 @@
           </a:lstStyle>
           <a:p xmlns:a="http://schemas.openxmlformats.org/drawingml/2006/main">
             <a:pPr>
+              <a:buNone/>
               <a:defRPr sz="3300" b="1">
                 <a:solidFill>
                   <a:srgbClr val="F7FAF8"/>
@@ -10667,6 +11000,7 @@
               </a:defRPr>
             </a:defPPr>
             <a:lvl1pPr>
+              <a:buNone/>
               <a:defRPr sz="1200" b="0">
                 <a:solidFill>
                   <a:srgbClr val="B9CFD2"/>
@@ -10677,6 +11011,7 @@
               </a:defRPr>
             </a:lvl1pPr>
             <a:lvl2pPr>
+              <a:buNone/>
               <a:defRPr sz="1200" b="0">
                 <a:solidFill>
                   <a:srgbClr val="B9CFD2"/>
@@ -10687,6 +11022,7 @@
               </a:defRPr>
             </a:lvl2pPr>
             <a:lvl3pPr>
+              <a:buNone/>
               <a:defRPr sz="1200" b="0">
                 <a:solidFill>
                   <a:srgbClr val="B9CFD2"/>
@@ -10697,6 +11033,7 @@
               </a:defRPr>
             </a:lvl3pPr>
             <a:lvl4pPr>
+              <a:buNone/>
               <a:defRPr sz="1200" b="0">
                 <a:solidFill>
                   <a:srgbClr val="B9CFD2"/>
@@ -10707,6 +11044,7 @@
               </a:defRPr>
             </a:lvl4pPr>
             <a:lvl5pPr>
+              <a:buNone/>
               <a:defRPr sz="1200" b="0">
                 <a:solidFill>
                   <a:srgbClr val="B9CFD2"/>
@@ -10717,6 +11055,7 @@
               </a:defRPr>
             </a:lvl5pPr>
             <a:lvl6pPr>
+              <a:buNone/>
               <a:defRPr sz="1200" b="0">
                 <a:solidFill>
                   <a:srgbClr val="B9CFD2"/>
@@ -10727,6 +11066,7 @@
               </a:defRPr>
             </a:lvl6pPr>
             <a:lvl7pPr>
+              <a:buNone/>
               <a:defRPr sz="1200" b="0">
                 <a:solidFill>
                   <a:srgbClr val="B9CFD2"/>
@@ -10737,6 +11077,7 @@
               </a:defRPr>
             </a:lvl7pPr>
             <a:lvl8pPr>
+              <a:buNone/>
               <a:defRPr sz="1200" b="0">
                 <a:solidFill>
                   <a:srgbClr val="B9CFD2"/>
@@ -10747,6 +11088,7 @@
               </a:defRPr>
             </a:lvl8pPr>
             <a:lvl9pPr>
+              <a:buNone/>
               <a:defRPr sz="1200" b="0">
                 <a:solidFill>
                   <a:srgbClr val="B9CFD2"/>
@@ -10759,6 +11101,7 @@
           </a:lstStyle>
           <a:p xmlns:a="http://schemas.openxmlformats.org/drawingml/2006/main">
             <a:pPr>
+              <a:buNone/>
               <a:defRPr sz="1200" b="0">
                 <a:solidFill>
                   <a:srgbClr val="B9CFD2"/>
@@ -10825,6 +11168,7 @@
               </a:defRPr>
             </a:defPPr>
             <a:lvl1pPr>
+              <a:buNone/>
               <a:defRPr sz="1350" b="1">
                 <a:solidFill>
                   <a:srgbClr val="83E3CD"/>
@@ -10835,6 +11179,7 @@
               </a:defRPr>
             </a:lvl1pPr>
             <a:lvl2pPr>
+              <a:buNone/>
               <a:defRPr sz="1350" b="1">
                 <a:solidFill>
                   <a:srgbClr val="83E3CD"/>
@@ -10845,6 +11190,7 @@
               </a:defRPr>
             </a:lvl2pPr>
             <a:lvl3pPr>
+              <a:buNone/>
               <a:defRPr sz="1350" b="1">
                 <a:solidFill>
                   <a:srgbClr val="83E3CD"/>
@@ -10855,6 +11201,7 @@
               </a:defRPr>
             </a:lvl3pPr>
             <a:lvl4pPr>
+              <a:buNone/>
               <a:defRPr sz="1350" b="1">
                 <a:solidFill>
                   <a:srgbClr val="83E3CD"/>
@@ -10865,6 +11212,7 @@
               </a:defRPr>
             </a:lvl4pPr>
             <a:lvl5pPr>
+              <a:buNone/>
               <a:defRPr sz="1350" b="1">
                 <a:solidFill>
                   <a:srgbClr val="83E3CD"/>
@@ -10875,6 +11223,7 @@
               </a:defRPr>
             </a:lvl5pPr>
             <a:lvl6pPr>
+              <a:buNone/>
               <a:defRPr sz="1350" b="1">
                 <a:solidFill>
                   <a:srgbClr val="83E3CD"/>
@@ -10885,6 +11234,7 @@
               </a:defRPr>
             </a:lvl6pPr>
             <a:lvl7pPr>
+              <a:buNone/>
               <a:defRPr sz="1350" b="1">
                 <a:solidFill>
                   <a:srgbClr val="83E3CD"/>
@@ -10895,6 +11245,7 @@
               </a:defRPr>
             </a:lvl7pPr>
             <a:lvl8pPr>
+              <a:buNone/>
               <a:defRPr sz="1350" b="1">
                 <a:solidFill>
                   <a:srgbClr val="83E3CD"/>
@@ -10905,6 +11256,7 @@
               </a:defRPr>
             </a:lvl8pPr>
             <a:lvl9pPr>
+              <a:buNone/>
               <a:defRPr sz="1350" b="1">
                 <a:solidFill>
                   <a:srgbClr val="83E3CD"/>
@@ -10917,6 +11269,7 @@
           </a:lstStyle>
           <a:p xmlns:a="http://schemas.openxmlformats.org/drawingml/2006/main">
             <a:pPr>
+              <a:buNone/>
               <a:defRPr sz="1350" b="1">
                 <a:solidFill>
                   <a:srgbClr val="83E3CD"/>
@@ -10983,6 +11336,7 @@
               </a:defRPr>
             </a:defPPr>
             <a:lvl1pPr>
+              <a:buNone/>
               <a:defRPr sz="2175" b="1">
                 <a:solidFill>
                   <a:srgbClr val="83E3CD"/>
@@ -10993,6 +11347,7 @@
               </a:defRPr>
             </a:lvl1pPr>
             <a:lvl2pPr>
+              <a:buNone/>
               <a:defRPr sz="2175" b="1">
                 <a:solidFill>
                   <a:srgbClr val="83E3CD"/>
@@ -11003,6 +11358,7 @@
               </a:defRPr>
             </a:lvl2pPr>
             <a:lvl3pPr>
+              <a:buNone/>
               <a:defRPr sz="2175" b="1">
                 <a:solidFill>
                   <a:srgbClr val="83E3CD"/>
@@ -11013,6 +11369,7 @@
               </a:defRPr>
             </a:lvl3pPr>
             <a:lvl4pPr>
+              <a:buNone/>
               <a:defRPr sz="2175" b="1">
                 <a:solidFill>
                   <a:srgbClr val="83E3CD"/>
@@ -11023,6 +11380,7 @@
               </a:defRPr>
             </a:lvl4pPr>
             <a:lvl5pPr>
+              <a:buNone/>
               <a:defRPr sz="2175" b="1">
                 <a:solidFill>
                   <a:srgbClr val="83E3CD"/>
@@ -11033,6 +11391,7 @@
               </a:defRPr>
             </a:lvl5pPr>
             <a:lvl6pPr>
+              <a:buNone/>
               <a:defRPr sz="2175" b="1">
                 <a:solidFill>
                   <a:srgbClr val="83E3CD"/>
@@ -11043,6 +11402,7 @@
               </a:defRPr>
             </a:lvl6pPr>
             <a:lvl7pPr>
+              <a:buNone/>
               <a:defRPr sz="2175" b="1">
                 <a:solidFill>
                   <a:srgbClr val="83E3CD"/>
@@ -11053,6 +11413,7 @@
               </a:defRPr>
             </a:lvl7pPr>
             <a:lvl8pPr>
+              <a:buNone/>
               <a:defRPr sz="2175" b="1">
                 <a:solidFill>
                   <a:srgbClr val="83E3CD"/>
@@ -11063,6 +11424,7 @@
               </a:defRPr>
             </a:lvl8pPr>
             <a:lvl9pPr>
+              <a:buNone/>
               <a:defRPr sz="2175" b="1">
                 <a:solidFill>
                   <a:srgbClr val="83E3CD"/>
@@ -11075,6 +11437,7 @@
           </a:lstStyle>
           <a:p xmlns:a="http://schemas.openxmlformats.org/drawingml/2006/main">
             <a:pPr>
+              <a:buNone/>
               <a:defRPr sz="2175" b="1">
                 <a:solidFill>
                   <a:srgbClr val="83E3CD"/>
@@ -11141,6 +11504,7 @@
               </a:defRPr>
             </a:defPPr>
             <a:lvl1pPr>
+              <a:buNone/>
               <a:defRPr sz="2025" b="0">
                 <a:solidFill>
                   <a:srgbClr val="B9CFD2"/>
@@ -11151,6 +11515,7 @@
               </a:defRPr>
             </a:lvl1pPr>
             <a:lvl2pPr>
+              <a:buNone/>
               <a:defRPr sz="2025" b="0">
                 <a:solidFill>
                   <a:srgbClr val="B9CFD2"/>
@@ -11161,6 +11526,7 @@
               </a:defRPr>
             </a:lvl2pPr>
             <a:lvl3pPr>
+              <a:buNone/>
               <a:defRPr sz="2025" b="0">
                 <a:solidFill>
                   <a:srgbClr val="B9CFD2"/>
@@ -11171,6 +11537,7 @@
               </a:defRPr>
             </a:lvl3pPr>
             <a:lvl4pPr>
+              <a:buNone/>
               <a:defRPr sz="2025" b="0">
                 <a:solidFill>
                   <a:srgbClr val="B9CFD2"/>
@@ -11181,6 +11548,7 @@
               </a:defRPr>
             </a:lvl4pPr>
             <a:lvl5pPr>
+              <a:buNone/>
               <a:defRPr sz="2025" b="0">
                 <a:solidFill>
                   <a:srgbClr val="B9CFD2"/>
@@ -11191,6 +11559,7 @@
               </a:defRPr>
             </a:lvl5pPr>
             <a:lvl6pPr>
+              <a:buNone/>
               <a:defRPr sz="2025" b="0">
                 <a:solidFill>
                   <a:srgbClr val="B9CFD2"/>
@@ -11201,6 +11570,7 @@
               </a:defRPr>
             </a:lvl6pPr>
             <a:lvl7pPr>
+              <a:buNone/>
               <a:defRPr sz="2025" b="0">
                 <a:solidFill>
                   <a:srgbClr val="B9CFD2"/>
@@ -11211,6 +11581,7 @@
               </a:defRPr>
             </a:lvl7pPr>
             <a:lvl8pPr>
+              <a:buNone/>
               <a:defRPr sz="2025" b="0">
                 <a:solidFill>
                   <a:srgbClr val="B9CFD2"/>
@@ -11221,6 +11592,7 @@
               </a:defRPr>
             </a:lvl8pPr>
             <a:lvl9pPr>
+              <a:buNone/>
               <a:defRPr sz="2025" b="0">
                 <a:solidFill>
                   <a:srgbClr val="B9CFD2"/>
@@ -11233,6 +11605,7 @@
           </a:lstStyle>
           <a:p xmlns:a="http://schemas.openxmlformats.org/drawingml/2006/main">
             <a:pPr>
+              <a:buNone/>
               <a:defRPr sz="2025" b="0">
                 <a:solidFill>
                   <a:srgbClr val="B9CFD2"/>
@@ -11261,7 +11634,7 @@
           <p:cNvPr id="7" name="">
             <a:extLst xmlns:a="http://schemas.openxmlformats.org/drawingml/2006/main">
               <a:ext uri="{FF2B5EF4-FFF2-40B4-BE49-F238E27FC236}">
-                <a16:creationId xmlns:a16="http://schemas.microsoft.com/office/drawing/2014/main" id="{A7D946A5-34B7-428F-AD8E-0DF1C7008AA7}"/>
+                <a16:creationId xmlns:a16="http://schemas.microsoft.com/office/drawing/2014/main" id="{77FF1621-3826-4C4E-B22A-5F033C8F2639}"/>
               </a:ext>
             </a:extLst>
           </p:cNvPr>
@@ -11271,7 +11644,7 @@
           <p:nvPr/>
         </p:nvPicPr>
         <p:blipFill>
-          <a:blip xmlns:r="http://schemas.openxmlformats.org/officeDocument/2006/relationships" xmlns:a="http://schemas.openxmlformats.org/drawingml/2006/main" r:embed="Rf28634cf504d4980"/>
+          <a:blip xmlns:r="http://schemas.openxmlformats.org/officeDocument/2006/relationships" xmlns:a="http://schemas.openxmlformats.org/drawingml/2006/main" r:embed="R6ce41253e6624107"/>
           <a:srcRect xmlns:a="http://schemas.openxmlformats.org/drawingml/2006/main" l="2500" t="29700" r="2500" b="48600"/>
           <a:stretch xmlns:a="http://schemas.openxmlformats.org/drawingml/2006/main"/>
         </p:blipFill>
@@ -11328,6 +11701,7 @@
               </a:defRPr>
             </a:defPPr>
             <a:lvl1pPr>
+              <a:buNone/>
               <a:defRPr sz="2325" b="1">
                 <a:solidFill>
                   <a:srgbClr val="F7FAF8"/>
@@ -11338,6 +11712,7 @@
               </a:defRPr>
             </a:lvl1pPr>
             <a:lvl2pPr>
+              <a:buNone/>
               <a:defRPr sz="2325" b="1">
                 <a:solidFill>
                   <a:srgbClr val="F7FAF8"/>
@@ -11348,6 +11723,7 @@
               </a:defRPr>
             </a:lvl2pPr>
             <a:lvl3pPr>
+              <a:buNone/>
               <a:defRPr sz="2325" b="1">
                 <a:solidFill>
                   <a:srgbClr val="F7FAF8"/>
@@ -11358,6 +11734,7 @@
               </a:defRPr>
             </a:lvl3pPr>
             <a:lvl4pPr>
+              <a:buNone/>
               <a:defRPr sz="2325" b="1">
                 <a:solidFill>
                   <a:srgbClr val="F7FAF8"/>
@@ -11368,6 +11745,7 @@
               </a:defRPr>
             </a:lvl4pPr>
             <a:lvl5pPr>
+              <a:buNone/>
               <a:defRPr sz="2325" b="1">
                 <a:solidFill>
                   <a:srgbClr val="F7FAF8"/>
@@ -11378,6 +11756,7 @@
               </a:defRPr>
             </a:lvl5pPr>
             <a:lvl6pPr>
+              <a:buNone/>
               <a:defRPr sz="2325" b="1">
                 <a:solidFill>
                   <a:srgbClr val="F7FAF8"/>
@@ -11388,6 +11767,7 @@
               </a:defRPr>
             </a:lvl6pPr>
             <a:lvl7pPr>
+              <a:buNone/>
               <a:defRPr sz="2325" b="1">
                 <a:solidFill>
                   <a:srgbClr val="F7FAF8"/>
@@ -11398,6 +11778,7 @@
               </a:defRPr>
             </a:lvl7pPr>
             <a:lvl8pPr>
+              <a:buNone/>
               <a:defRPr sz="2325" b="1">
                 <a:solidFill>
                   <a:srgbClr val="F7FAF8"/>
@@ -11408,6 +11789,7 @@
               </a:defRPr>
             </a:lvl8pPr>
             <a:lvl9pPr>
+              <a:buNone/>
               <a:defRPr sz="2325" b="1">
                 <a:solidFill>
                   <a:srgbClr val="F7FAF8"/>
@@ -11420,6 +11802,7 @@
           </a:lstStyle>
           <a:p xmlns:a="http://schemas.openxmlformats.org/drawingml/2006/main">
             <a:pPr>
+              <a:buNone/>
               <a:defRPr sz="2325" b="1">
                 <a:solidFill>
                   <a:srgbClr val="F7FAF8"/>
@@ -11486,6 +11869,7 @@
               </a:defRPr>
             </a:defPPr>
             <a:lvl1pPr>
+              <a:buNone/>
               <a:defRPr sz="2325" b="1">
                 <a:solidFill>
                   <a:srgbClr val="F7FAF8"/>
@@ -11496,6 +11880,7 @@
               </a:defRPr>
             </a:lvl1pPr>
             <a:lvl2pPr>
+              <a:buNone/>
               <a:defRPr sz="2325" b="1">
                 <a:solidFill>
                   <a:srgbClr val="F7FAF8"/>
@@ -11506,6 +11891,7 @@
               </a:defRPr>
             </a:lvl2pPr>
             <a:lvl3pPr>
+              <a:buNone/>
               <a:defRPr sz="2325" b="1">
                 <a:solidFill>
                   <a:srgbClr val="F7FAF8"/>
@@ -11516,6 +11902,7 @@
               </a:defRPr>
             </a:lvl3pPr>
             <a:lvl4pPr>
+              <a:buNone/>
               <a:defRPr sz="2325" b="1">
                 <a:solidFill>
                   <a:srgbClr val="F7FAF8"/>
@@ -11526,6 +11913,7 @@
               </a:defRPr>
             </a:lvl4pPr>
             <a:lvl5pPr>
+              <a:buNone/>
               <a:defRPr sz="2325" b="1">
                 <a:solidFill>
                   <a:srgbClr val="F7FAF8"/>
@@ -11536,6 +11924,7 @@
               </a:defRPr>
             </a:lvl5pPr>
             <a:lvl6pPr>
+              <a:buNone/>
               <a:defRPr sz="2325" b="1">
                 <a:solidFill>
                   <a:srgbClr val="F7FAF8"/>
@@ -11546,6 +11935,7 @@
               </a:defRPr>
             </a:lvl6pPr>
             <a:lvl7pPr>
+              <a:buNone/>
               <a:defRPr sz="2325" b="1">
                 <a:solidFill>
                   <a:srgbClr val="F7FAF8"/>
@@ -11556,6 +11946,7 @@
               </a:defRPr>
             </a:lvl7pPr>
             <a:lvl8pPr>
+              <a:buNone/>
               <a:defRPr sz="2325" b="1">
                 <a:solidFill>
                   <a:srgbClr val="F7FAF8"/>
@@ -11566,6 +11957,7 @@
               </a:defRPr>
             </a:lvl8pPr>
             <a:lvl9pPr>
+              <a:buNone/>
               <a:defRPr sz="2325" b="1">
                 <a:solidFill>
                   <a:srgbClr val="F7FAF8"/>
@@ -11578,6 +11970,7 @@
           </a:lstStyle>
           <a:p xmlns:a="http://schemas.openxmlformats.org/drawingml/2006/main">
             <a:pPr>
+              <a:buNone/>
               <a:defRPr sz="2325" b="1">
                 <a:solidFill>
                   <a:srgbClr val="F7FAF8"/>
@@ -11673,6 +12066,7 @@
               </a:defRPr>
             </a:defPPr>
             <a:lvl1pPr>
+              <a:buNone/>
               <a:defRPr sz="1350" b="1">
                 <a:solidFill>
                   <a:srgbClr val="0B716D"/>
@@ -11683,6 +12077,7 @@
               </a:defRPr>
             </a:lvl1pPr>
             <a:lvl2pPr>
+              <a:buNone/>
               <a:defRPr sz="1350" b="1">
                 <a:solidFill>
                   <a:srgbClr val="0B716D"/>
@@ -11693,6 +12088,7 @@
               </a:defRPr>
             </a:lvl2pPr>
             <a:lvl3pPr>
+              <a:buNone/>
               <a:defRPr sz="1350" b="1">
                 <a:solidFill>
                   <a:srgbClr val="0B716D"/>
@@ -11703,6 +12099,7 @@
               </a:defRPr>
             </a:lvl3pPr>
             <a:lvl4pPr>
+              <a:buNone/>
               <a:defRPr sz="1350" b="1">
                 <a:solidFill>
                   <a:srgbClr val="0B716D"/>
@@ -11713,6 +12110,7 @@
               </a:defRPr>
             </a:lvl4pPr>
             <a:lvl5pPr>
+              <a:buNone/>
               <a:defRPr sz="1350" b="1">
                 <a:solidFill>
                   <a:srgbClr val="0B716D"/>
@@ -11723,6 +12121,7 @@
               </a:defRPr>
             </a:lvl5pPr>
             <a:lvl6pPr>
+              <a:buNone/>
               <a:defRPr sz="1350" b="1">
                 <a:solidFill>
                   <a:srgbClr val="0B716D"/>
@@ -11733,6 +12132,7 @@
               </a:defRPr>
             </a:lvl6pPr>
             <a:lvl7pPr>
+              <a:buNone/>
               <a:defRPr sz="1350" b="1">
                 <a:solidFill>
                   <a:srgbClr val="0B716D"/>
@@ -11743,6 +12143,7 @@
               </a:defRPr>
             </a:lvl7pPr>
             <a:lvl8pPr>
+              <a:buNone/>
               <a:defRPr sz="1350" b="1">
                 <a:solidFill>
                   <a:srgbClr val="0B716D"/>
@@ -11753,6 +12154,7 @@
               </a:defRPr>
             </a:lvl8pPr>
             <a:lvl9pPr>
+              <a:buNone/>
               <a:defRPr sz="1350" b="1">
                 <a:solidFill>
                   <a:srgbClr val="0B716D"/>
@@ -11765,6 +12167,7 @@
           </a:lstStyle>
           <a:p xmlns:a="http://schemas.openxmlformats.org/drawingml/2006/main">
             <a:pPr>
+              <a:buNone/>
               <a:defRPr sz="1350" b="1">
                 <a:solidFill>
                   <a:srgbClr val="0B716D"/>
@@ -11831,6 +12234,7 @@
               </a:defRPr>
             </a:defPPr>
             <a:lvl1pPr>
+              <a:buNone/>
               <a:defRPr sz="3300" b="1">
                 <a:solidFill>
                   <a:srgbClr val="102E39"/>
@@ -11841,6 +12245,7 @@
               </a:defRPr>
             </a:lvl1pPr>
             <a:lvl2pPr>
+              <a:buNone/>
               <a:defRPr sz="3300" b="1">
                 <a:solidFill>
                   <a:srgbClr val="102E39"/>
@@ -11851,6 +12256,7 @@
               </a:defRPr>
             </a:lvl2pPr>
             <a:lvl3pPr>
+              <a:buNone/>
               <a:defRPr sz="3300" b="1">
                 <a:solidFill>
                   <a:srgbClr val="102E39"/>
@@ -11861,6 +12267,7 @@
               </a:defRPr>
             </a:lvl3pPr>
             <a:lvl4pPr>
+              <a:buNone/>
               <a:defRPr sz="3300" b="1">
                 <a:solidFill>
                   <a:srgbClr val="102E39"/>
@@ -11871,6 +12278,7 @@
               </a:defRPr>
             </a:lvl4pPr>
             <a:lvl5pPr>
+              <a:buNone/>
               <a:defRPr sz="3300" b="1">
                 <a:solidFill>
                   <a:srgbClr val="102E39"/>
@@ -11881,6 +12289,7 @@
               </a:defRPr>
             </a:lvl5pPr>
             <a:lvl6pPr>
+              <a:buNone/>
               <a:defRPr sz="3300" b="1">
                 <a:solidFill>
                   <a:srgbClr val="102E39"/>
@@ -11891,6 +12300,7 @@
               </a:defRPr>
             </a:lvl6pPr>
             <a:lvl7pPr>
+              <a:buNone/>
               <a:defRPr sz="3300" b="1">
                 <a:solidFill>
                   <a:srgbClr val="102E39"/>
@@ -11901,6 +12311,7 @@
               </a:defRPr>
             </a:lvl7pPr>
             <a:lvl8pPr>
+              <a:buNone/>
               <a:defRPr sz="3300" b="1">
                 <a:solidFill>
                   <a:srgbClr val="102E39"/>
@@ -11911,6 +12322,7 @@
               </a:defRPr>
             </a:lvl8pPr>
             <a:lvl9pPr>
+              <a:buNone/>
               <a:defRPr sz="3300" b="1">
                 <a:solidFill>
                   <a:srgbClr val="102E39"/>
@@ -11923,6 +12335,7 @@
           </a:lstStyle>
           <a:p xmlns:a="http://schemas.openxmlformats.org/drawingml/2006/main">
             <a:pPr>
+              <a:buNone/>
               <a:defRPr sz="3300" b="1">
                 <a:solidFill>
                   <a:srgbClr val="102E39"/>
@@ -11989,6 +12402,7 @@
               </a:defRPr>
             </a:defPPr>
             <a:lvl1pPr>
+              <a:buNone/>
               <a:defRPr sz="1200" b="0">
                 <a:solidFill>
                   <a:srgbClr val="526B72"/>
@@ -11999,6 +12413,7 @@
               </a:defRPr>
             </a:lvl1pPr>
             <a:lvl2pPr>
+              <a:buNone/>
               <a:defRPr sz="1200" b="0">
                 <a:solidFill>
                   <a:srgbClr val="526B72"/>
@@ -12009,6 +12424,7 @@
               </a:defRPr>
             </a:lvl2pPr>
             <a:lvl3pPr>
+              <a:buNone/>
               <a:defRPr sz="1200" b="0">
                 <a:solidFill>
                   <a:srgbClr val="526B72"/>
@@ -12019,6 +12435,7 @@
               </a:defRPr>
             </a:lvl3pPr>
             <a:lvl4pPr>
+              <a:buNone/>
               <a:defRPr sz="1200" b="0">
                 <a:solidFill>
                   <a:srgbClr val="526B72"/>
@@ -12029,6 +12446,7 @@
               </a:defRPr>
             </a:lvl4pPr>
             <a:lvl5pPr>
+              <a:buNone/>
               <a:defRPr sz="1200" b="0">
                 <a:solidFill>
                   <a:srgbClr val="526B72"/>
@@ -12039,6 +12457,7 @@
               </a:defRPr>
             </a:lvl5pPr>
             <a:lvl6pPr>
+              <a:buNone/>
               <a:defRPr sz="1200" b="0">
                 <a:solidFill>
                   <a:srgbClr val="526B72"/>
@@ -12049,6 +12468,7 @@
               </a:defRPr>
             </a:lvl6pPr>
             <a:lvl7pPr>
+              <a:buNone/>
               <a:defRPr sz="1200" b="0">
                 <a:solidFill>
                   <a:srgbClr val="526B72"/>
@@ -12059,6 +12479,7 @@
               </a:defRPr>
             </a:lvl7pPr>
             <a:lvl8pPr>
+              <a:buNone/>
               <a:defRPr sz="1200" b="0">
                 <a:solidFill>
                   <a:srgbClr val="526B72"/>
@@ -12069,6 +12490,7 @@
               </a:defRPr>
             </a:lvl8pPr>
             <a:lvl9pPr>
+              <a:buNone/>
               <a:defRPr sz="1200" b="0">
                 <a:solidFill>
                   <a:srgbClr val="526B72"/>
@@ -12081,6 +12503,7 @@
           </a:lstStyle>
           <a:p xmlns:a="http://schemas.openxmlformats.org/drawingml/2006/main">
             <a:pPr>
+              <a:buNone/>
               <a:defRPr sz="1200" b="0">
                 <a:solidFill>
                   <a:srgbClr val="526B72"/>
@@ -12147,6 +12570,7 @@
               </a:defRPr>
             </a:defPPr>
             <a:lvl1pPr>
+              <a:buNone/>
               <a:defRPr sz="1350" b="1">
                 <a:solidFill>
                   <a:srgbClr val="0B716D"/>
@@ -12157,6 +12581,7 @@
               </a:defRPr>
             </a:lvl1pPr>
             <a:lvl2pPr>
+              <a:buNone/>
               <a:defRPr sz="1350" b="1">
                 <a:solidFill>
                   <a:srgbClr val="0B716D"/>
@@ -12167,6 +12592,7 @@
               </a:defRPr>
             </a:lvl2pPr>
             <a:lvl3pPr>
+              <a:buNone/>
               <a:defRPr sz="1350" b="1">
                 <a:solidFill>
                   <a:srgbClr val="0B716D"/>
@@ -12177,6 +12603,7 @@
               </a:defRPr>
             </a:lvl3pPr>
             <a:lvl4pPr>
+              <a:buNone/>
               <a:defRPr sz="1350" b="1">
                 <a:solidFill>
                   <a:srgbClr val="0B716D"/>
@@ -12187,6 +12614,7 @@
               </a:defRPr>
             </a:lvl4pPr>
             <a:lvl5pPr>
+              <a:buNone/>
               <a:defRPr sz="1350" b="1">
                 <a:solidFill>
                   <a:srgbClr val="0B716D"/>
@@ -12197,6 +12625,7 @@
               </a:defRPr>
             </a:lvl5pPr>
             <a:lvl6pPr>
+              <a:buNone/>
               <a:defRPr sz="1350" b="1">
                 <a:solidFill>
                   <a:srgbClr val="0B716D"/>
@@ -12207,6 +12636,7 @@
               </a:defRPr>
             </a:lvl6pPr>
             <a:lvl7pPr>
+              <a:buNone/>
               <a:defRPr sz="1350" b="1">
                 <a:solidFill>
                   <a:srgbClr val="0B716D"/>
@@ -12217,6 +12647,7 @@
               </a:defRPr>
             </a:lvl7pPr>
             <a:lvl8pPr>
+              <a:buNone/>
               <a:defRPr sz="1350" b="1">
                 <a:solidFill>
                   <a:srgbClr val="0B716D"/>
@@ -12227,6 +12658,7 @@
               </a:defRPr>
             </a:lvl8pPr>
             <a:lvl9pPr>
+              <a:buNone/>
               <a:defRPr sz="1350" b="1">
                 <a:solidFill>
                   <a:srgbClr val="0B716D"/>
@@ -12239,6 +12671,7 @@
           </a:lstStyle>
           <a:p xmlns:a="http://schemas.openxmlformats.org/drawingml/2006/main">
             <a:pPr>
+              <a:buNone/>
               <a:defRPr sz="1350" b="1">
                 <a:solidFill>
                   <a:srgbClr val="0B716D"/>
@@ -12305,6 +12738,7 @@
               </a:defRPr>
             </a:defPPr>
             <a:lvl1pPr>
+              <a:buNone/>
               <a:defRPr sz="1575" b="1">
                 <a:solidFill>
                   <a:srgbClr val="0B716D"/>
@@ -12315,6 +12749,7 @@
               </a:defRPr>
             </a:lvl1pPr>
             <a:lvl2pPr>
+              <a:buNone/>
               <a:defRPr sz="1575" b="1">
                 <a:solidFill>
                   <a:srgbClr val="0B716D"/>
@@ -12325,6 +12760,7 @@
               </a:defRPr>
             </a:lvl2pPr>
             <a:lvl3pPr>
+              <a:buNone/>
               <a:defRPr sz="1575" b="1">
                 <a:solidFill>
                   <a:srgbClr val="0B716D"/>
@@ -12335,6 +12771,7 @@
               </a:defRPr>
             </a:lvl3pPr>
             <a:lvl4pPr>
+              <a:buNone/>
               <a:defRPr sz="1575" b="1">
                 <a:solidFill>
                   <a:srgbClr val="0B716D"/>
@@ -12345,6 +12782,7 @@
               </a:defRPr>
             </a:lvl4pPr>
             <a:lvl5pPr>
+              <a:buNone/>
               <a:defRPr sz="1575" b="1">
                 <a:solidFill>
                   <a:srgbClr val="0B716D"/>
@@ -12355,6 +12793,7 @@
               </a:defRPr>
             </a:lvl5pPr>
             <a:lvl6pPr>
+              <a:buNone/>
               <a:defRPr sz="1575" b="1">
                 <a:solidFill>
                   <a:srgbClr val="0B716D"/>
@@ -12365,6 +12804,7 @@
               </a:defRPr>
             </a:lvl6pPr>
             <a:lvl7pPr>
+              <a:buNone/>
               <a:defRPr sz="1575" b="1">
                 <a:solidFill>
                   <a:srgbClr val="0B716D"/>
@@ -12375,6 +12815,7 @@
               </a:defRPr>
             </a:lvl7pPr>
             <a:lvl8pPr>
+              <a:buNone/>
               <a:defRPr sz="1575" b="1">
                 <a:solidFill>
                   <a:srgbClr val="0B716D"/>
@@ -12385,6 +12826,7 @@
               </a:defRPr>
             </a:lvl8pPr>
             <a:lvl9pPr>
+              <a:buNone/>
               <a:defRPr sz="1575" b="1">
                 <a:solidFill>
                   <a:srgbClr val="0B716D"/>
@@ -12397,6 +12839,7 @@
           </a:lstStyle>
           <a:p xmlns:a="http://schemas.openxmlformats.org/drawingml/2006/main">
             <a:pPr>
+              <a:buNone/>
               <a:defRPr sz="1575" b="1">
                 <a:solidFill>
                   <a:srgbClr val="0B716D"/>
@@ -12425,7 +12868,7 @@
           <p:cNvPr id="6" name="">
             <a:extLst xmlns:a="http://schemas.openxmlformats.org/drawingml/2006/main">
               <a:ext uri="{FF2B5EF4-FFF2-40B4-BE49-F238E27FC236}">
-                <a16:creationId xmlns:a16="http://schemas.microsoft.com/office/drawing/2014/main" id="{5C20193B-3278-4667-AFFF-3472202CB2ED}"/>
+                <a16:creationId xmlns:a16="http://schemas.microsoft.com/office/drawing/2014/main" id="{883B82E7-EF78-4E97-8685-8B8CFB41E881}"/>
               </a:ext>
             </a:extLst>
           </p:cNvPr>
@@ -12858,6 +13301,7 @@
               </a:defRPr>
             </a:defPPr>
             <a:lvl1pPr>
+              <a:buNone/>
               <a:defRPr sz="3375" b="1">
                 <a:solidFill>
                   <a:srgbClr val="0B716D"/>
@@ -12868,6 +13312,7 @@
               </a:defRPr>
             </a:lvl1pPr>
             <a:lvl2pPr>
+              <a:buNone/>
               <a:defRPr sz="3375" b="1">
                 <a:solidFill>
                   <a:srgbClr val="0B716D"/>
@@ -12878,6 +13323,7 @@
               </a:defRPr>
             </a:lvl2pPr>
             <a:lvl3pPr>
+              <a:buNone/>
               <a:defRPr sz="3375" b="1">
                 <a:solidFill>
                   <a:srgbClr val="0B716D"/>
@@ -12888,6 +13334,7 @@
               </a:defRPr>
             </a:lvl3pPr>
             <a:lvl4pPr>
+              <a:buNone/>
               <a:defRPr sz="3375" b="1">
                 <a:solidFill>
                   <a:srgbClr val="0B716D"/>
@@ -12898,6 +13345,7 @@
               </a:defRPr>
             </a:lvl4pPr>
             <a:lvl5pPr>
+              <a:buNone/>
               <a:defRPr sz="3375" b="1">
                 <a:solidFill>
                   <a:srgbClr val="0B716D"/>
@@ -12908,6 +13356,7 @@
               </a:defRPr>
             </a:lvl5pPr>
             <a:lvl6pPr>
+              <a:buNone/>
               <a:defRPr sz="3375" b="1">
                 <a:solidFill>
                   <a:srgbClr val="0B716D"/>
@@ -12918,6 +13367,7 @@
               </a:defRPr>
             </a:lvl6pPr>
             <a:lvl7pPr>
+              <a:buNone/>
               <a:defRPr sz="3375" b="1">
                 <a:solidFill>
                   <a:srgbClr val="0B716D"/>
@@ -12928,6 +13378,7 @@
               </a:defRPr>
             </a:lvl7pPr>
             <a:lvl8pPr>
+              <a:buNone/>
               <a:defRPr sz="3375" b="1">
                 <a:solidFill>
                   <a:srgbClr val="0B716D"/>
@@ -12938,6 +13389,7 @@
               </a:defRPr>
             </a:lvl8pPr>
             <a:lvl9pPr>
+              <a:buNone/>
               <a:defRPr sz="3375" b="1">
                 <a:solidFill>
                   <a:srgbClr val="0B716D"/>
@@ -12950,6 +13402,7 @@
           </a:lstStyle>
           <a:p xmlns:a="http://schemas.openxmlformats.org/drawingml/2006/main">
             <a:pPr>
+              <a:buNone/>
               <a:defRPr sz="3375" b="1">
                 <a:solidFill>
                   <a:srgbClr val="0B716D"/>
@@ -13016,6 +13469,7 @@
               </a:defRPr>
             </a:defPPr>
             <a:lvl1pPr>
+              <a:buNone/>
               <a:defRPr sz="2025" b="0">
                 <a:solidFill>
                   <a:srgbClr val="102E39"/>
@@ -13026,6 +13480,7 @@
               </a:defRPr>
             </a:lvl1pPr>
             <a:lvl2pPr>
+              <a:buNone/>
               <a:defRPr sz="2025" b="0">
                 <a:solidFill>
                   <a:srgbClr val="102E39"/>
@@ -13036,6 +13491,7 @@
               </a:defRPr>
             </a:lvl2pPr>
             <a:lvl3pPr>
+              <a:buNone/>
               <a:defRPr sz="2025" b="0">
                 <a:solidFill>
                   <a:srgbClr val="102E39"/>
@@ -13046,6 +13502,7 @@
               </a:defRPr>
             </a:lvl3pPr>
             <a:lvl4pPr>
+              <a:buNone/>
               <a:defRPr sz="2025" b="0">
                 <a:solidFill>
                   <a:srgbClr val="102E39"/>
@@ -13056,6 +13513,7 @@
               </a:defRPr>
             </a:lvl4pPr>
             <a:lvl5pPr>
+              <a:buNone/>
               <a:defRPr sz="2025" b="0">
                 <a:solidFill>
                   <a:srgbClr val="102E39"/>
@@ -13066,6 +13524,7 @@
               </a:defRPr>
             </a:lvl5pPr>
             <a:lvl6pPr>
+              <a:buNone/>
               <a:defRPr sz="2025" b="0">
                 <a:solidFill>
                   <a:srgbClr val="102E39"/>
@@ -13076,6 +13535,7 @@
               </a:defRPr>
             </a:lvl6pPr>
             <a:lvl7pPr>
+              <a:buNone/>
               <a:defRPr sz="2025" b="0">
                 <a:solidFill>
                   <a:srgbClr val="102E39"/>
@@ -13086,6 +13546,7 @@
               </a:defRPr>
             </a:lvl7pPr>
             <a:lvl8pPr>
+              <a:buNone/>
               <a:defRPr sz="2025" b="0">
                 <a:solidFill>
                   <a:srgbClr val="102E39"/>
@@ -13096,6 +13557,7 @@
               </a:defRPr>
             </a:lvl8pPr>
             <a:lvl9pPr>
+              <a:buNone/>
               <a:defRPr sz="2025" b="0">
                 <a:solidFill>
                   <a:srgbClr val="102E39"/>
@@ -13108,6 +13570,7 @@
           </a:lstStyle>
           <a:p xmlns:a="http://schemas.openxmlformats.org/drawingml/2006/main">
             <a:pPr>
+              <a:buNone/>
               <a:defRPr sz="2025" b="0">
                 <a:solidFill>
                   <a:srgbClr val="102E39"/>
@@ -13174,6 +13637,7 @@
               </a:defRPr>
             </a:defPPr>
             <a:lvl1pPr>
+              <a:buNone/>
               <a:defRPr sz="1950" b="0">
                 <a:solidFill>
                   <a:srgbClr val="526B72"/>
@@ -13184,6 +13648,7 @@
               </a:defRPr>
             </a:lvl1pPr>
             <a:lvl2pPr>
+              <a:buNone/>
               <a:defRPr sz="1950" b="0">
                 <a:solidFill>
                   <a:srgbClr val="526B72"/>
@@ -13194,6 +13659,7 @@
               </a:defRPr>
             </a:lvl2pPr>
             <a:lvl3pPr>
+              <a:buNone/>
               <a:defRPr sz="1950" b="0">
                 <a:solidFill>
                   <a:srgbClr val="526B72"/>
@@ -13204,6 +13670,7 @@
               </a:defRPr>
             </a:lvl3pPr>
             <a:lvl4pPr>
+              <a:buNone/>
               <a:defRPr sz="1950" b="0">
                 <a:solidFill>
                   <a:srgbClr val="526B72"/>
@@ -13214,6 +13681,7 @@
               </a:defRPr>
             </a:lvl4pPr>
             <a:lvl5pPr>
+              <a:buNone/>
               <a:defRPr sz="1950" b="0">
                 <a:solidFill>
                   <a:srgbClr val="526B72"/>
@@ -13224,6 +13692,7 @@
               </a:defRPr>
             </a:lvl5pPr>
             <a:lvl6pPr>
+              <a:buNone/>
               <a:defRPr sz="1950" b="0">
                 <a:solidFill>
                   <a:srgbClr val="526B72"/>
@@ -13234,6 +13703,7 @@
               </a:defRPr>
             </a:lvl6pPr>
             <a:lvl7pPr>
+              <a:buNone/>
               <a:defRPr sz="1950" b="0">
                 <a:solidFill>
                   <a:srgbClr val="526B72"/>
@@ -13244,6 +13714,7 @@
               </a:defRPr>
             </a:lvl7pPr>
             <a:lvl8pPr>
+              <a:buNone/>
               <a:defRPr sz="1950" b="0">
                 <a:solidFill>
                   <a:srgbClr val="526B72"/>
@@ -13254,6 +13725,7 @@
               </a:defRPr>
             </a:lvl8pPr>
             <a:lvl9pPr>
+              <a:buNone/>
               <a:defRPr sz="1950" b="0">
                 <a:solidFill>
                   <a:srgbClr val="526B72"/>
@@ -13266,6 +13738,7 @@
           </a:lstStyle>
           <a:p xmlns:a="http://schemas.openxmlformats.org/drawingml/2006/main">
             <a:pPr>
+              <a:buNone/>
               <a:defRPr sz="1950" b="0">
                 <a:solidFill>
                   <a:srgbClr val="526B72"/>
@@ -13289,6 +13762,7 @@
           </a:p>
           <a:p xmlns:a="http://schemas.openxmlformats.org/drawingml/2006/main">
             <a:pPr>
+              <a:buNone/>
               <a:defRPr sz="1950" b="0">
                 <a:solidFill>
                   <a:srgbClr val="526B72"/>
@@ -13384,6 +13858,7 @@
               </a:defRPr>
             </a:defPPr>
             <a:lvl1pPr>
+              <a:buNone/>
               <a:defRPr sz="1350" b="1">
                 <a:solidFill>
                   <a:srgbClr val="83E3CD"/>
@@ -13394,6 +13869,7 @@
               </a:defRPr>
             </a:lvl1pPr>
             <a:lvl2pPr>
+              <a:buNone/>
               <a:defRPr sz="1350" b="1">
                 <a:solidFill>
                   <a:srgbClr val="83E3CD"/>
@@ -13404,6 +13880,7 @@
               </a:defRPr>
             </a:lvl2pPr>
             <a:lvl3pPr>
+              <a:buNone/>
               <a:defRPr sz="1350" b="1">
                 <a:solidFill>
                   <a:srgbClr val="83E3CD"/>
@@ -13414,6 +13891,7 @@
               </a:defRPr>
             </a:lvl3pPr>
             <a:lvl4pPr>
+              <a:buNone/>
               <a:defRPr sz="1350" b="1">
                 <a:solidFill>
                   <a:srgbClr val="83E3CD"/>
@@ -13424,6 +13902,7 @@
               </a:defRPr>
             </a:lvl4pPr>
             <a:lvl5pPr>
+              <a:buNone/>
               <a:defRPr sz="1350" b="1">
                 <a:solidFill>
                   <a:srgbClr val="83E3CD"/>
@@ -13434,6 +13913,7 @@
               </a:defRPr>
             </a:lvl5pPr>
             <a:lvl6pPr>
+              <a:buNone/>
               <a:defRPr sz="1350" b="1">
                 <a:solidFill>
                   <a:srgbClr val="83E3CD"/>
@@ -13444,6 +13924,7 @@
               </a:defRPr>
             </a:lvl6pPr>
             <a:lvl7pPr>
+              <a:buNone/>
               <a:defRPr sz="1350" b="1">
                 <a:solidFill>
                   <a:srgbClr val="83E3CD"/>
@@ -13454,6 +13935,7 @@
               </a:defRPr>
             </a:lvl7pPr>
             <a:lvl8pPr>
+              <a:buNone/>
               <a:defRPr sz="1350" b="1">
                 <a:solidFill>
                   <a:srgbClr val="83E3CD"/>
@@ -13464,6 +13946,7 @@
               </a:defRPr>
             </a:lvl8pPr>
             <a:lvl9pPr>
+              <a:buNone/>
               <a:defRPr sz="1350" b="1">
                 <a:solidFill>
                   <a:srgbClr val="83E3CD"/>
@@ -13476,6 +13959,7 @@
           </a:lstStyle>
           <a:p xmlns:a="http://schemas.openxmlformats.org/drawingml/2006/main">
             <a:pPr>
+              <a:buNone/>
               <a:defRPr sz="1350" b="1">
                 <a:solidFill>
                   <a:srgbClr val="83E3CD"/>
@@ -13542,6 +14026,7 @@
               </a:defRPr>
             </a:defPPr>
             <a:lvl1pPr>
+              <a:buNone/>
               <a:defRPr sz="3300" b="1">
                 <a:solidFill>
                   <a:srgbClr val="F7FAF8"/>
@@ -13552,6 +14037,7 @@
               </a:defRPr>
             </a:lvl1pPr>
             <a:lvl2pPr>
+              <a:buNone/>
               <a:defRPr sz="3300" b="1">
                 <a:solidFill>
                   <a:srgbClr val="F7FAF8"/>
@@ -13562,6 +14048,7 @@
               </a:defRPr>
             </a:lvl2pPr>
             <a:lvl3pPr>
+              <a:buNone/>
               <a:defRPr sz="3300" b="1">
                 <a:solidFill>
                   <a:srgbClr val="F7FAF8"/>
@@ -13572,6 +14059,7 @@
               </a:defRPr>
             </a:lvl3pPr>
             <a:lvl4pPr>
+              <a:buNone/>
               <a:defRPr sz="3300" b="1">
                 <a:solidFill>
                   <a:srgbClr val="F7FAF8"/>
@@ -13582,6 +14070,7 @@
               </a:defRPr>
             </a:lvl4pPr>
             <a:lvl5pPr>
+              <a:buNone/>
               <a:defRPr sz="3300" b="1">
                 <a:solidFill>
                   <a:srgbClr val="F7FAF8"/>
@@ -13592,6 +14081,7 @@
               </a:defRPr>
             </a:lvl5pPr>
             <a:lvl6pPr>
+              <a:buNone/>
               <a:defRPr sz="3300" b="1">
                 <a:solidFill>
                   <a:srgbClr val="F7FAF8"/>
@@ -13602,6 +14092,7 @@
               </a:defRPr>
             </a:lvl6pPr>
             <a:lvl7pPr>
+              <a:buNone/>
               <a:defRPr sz="3300" b="1">
                 <a:solidFill>
                   <a:srgbClr val="F7FAF8"/>
@@ -13612,6 +14103,7 @@
               </a:defRPr>
             </a:lvl7pPr>
             <a:lvl8pPr>
+              <a:buNone/>
               <a:defRPr sz="3300" b="1">
                 <a:solidFill>
                   <a:srgbClr val="F7FAF8"/>
@@ -13622,6 +14114,7 @@
               </a:defRPr>
             </a:lvl8pPr>
             <a:lvl9pPr>
+              <a:buNone/>
               <a:defRPr sz="3300" b="1">
                 <a:solidFill>
                   <a:srgbClr val="F7FAF8"/>
@@ -13634,6 +14127,7 @@
           </a:lstStyle>
           <a:p xmlns:a="http://schemas.openxmlformats.org/drawingml/2006/main">
             <a:pPr>
+              <a:buNone/>
               <a:defRPr sz="3300" b="1">
                 <a:solidFill>
                   <a:srgbClr val="F7FAF8"/>
@@ -13700,6 +14194,7 @@
               </a:defRPr>
             </a:defPPr>
             <a:lvl1pPr>
+              <a:buNone/>
               <a:defRPr sz="1200" b="0">
                 <a:solidFill>
                   <a:srgbClr val="B9CFD2"/>
@@ -13710,6 +14205,7 @@
               </a:defRPr>
             </a:lvl1pPr>
             <a:lvl2pPr>
+              <a:buNone/>
               <a:defRPr sz="1200" b="0">
                 <a:solidFill>
                   <a:srgbClr val="B9CFD2"/>
@@ -13720,6 +14216,7 @@
               </a:defRPr>
             </a:lvl2pPr>
             <a:lvl3pPr>
+              <a:buNone/>
               <a:defRPr sz="1200" b="0">
                 <a:solidFill>
                   <a:srgbClr val="B9CFD2"/>
@@ -13730,6 +14227,7 @@
               </a:defRPr>
             </a:lvl3pPr>
             <a:lvl4pPr>
+              <a:buNone/>
               <a:defRPr sz="1200" b="0">
                 <a:solidFill>
                   <a:srgbClr val="B9CFD2"/>
@@ -13740,6 +14238,7 @@
               </a:defRPr>
             </a:lvl4pPr>
             <a:lvl5pPr>
+              <a:buNone/>
               <a:defRPr sz="1200" b="0">
                 <a:solidFill>
                   <a:srgbClr val="B9CFD2"/>
@@ -13750,6 +14249,7 @@
               </a:defRPr>
             </a:lvl5pPr>
             <a:lvl6pPr>
+              <a:buNone/>
               <a:defRPr sz="1200" b="0">
                 <a:solidFill>
                   <a:srgbClr val="B9CFD2"/>
@@ -13760,6 +14260,7 @@
               </a:defRPr>
             </a:lvl6pPr>
             <a:lvl7pPr>
+              <a:buNone/>
               <a:defRPr sz="1200" b="0">
                 <a:solidFill>
                   <a:srgbClr val="B9CFD2"/>
@@ -13770,6 +14271,7 @@
               </a:defRPr>
             </a:lvl7pPr>
             <a:lvl8pPr>
+              <a:buNone/>
               <a:defRPr sz="1200" b="0">
                 <a:solidFill>
                   <a:srgbClr val="B9CFD2"/>
@@ -13780,6 +14282,7 @@
               </a:defRPr>
             </a:lvl8pPr>
             <a:lvl9pPr>
+              <a:buNone/>
               <a:defRPr sz="1200" b="0">
                 <a:solidFill>
                   <a:srgbClr val="B9CFD2"/>
@@ -13792,6 +14295,7 @@
           </a:lstStyle>
           <a:p xmlns:a="http://schemas.openxmlformats.org/drawingml/2006/main">
             <a:pPr>
+              <a:buNone/>
               <a:defRPr sz="1200" b="0">
                 <a:solidFill>
                   <a:srgbClr val="B9CFD2"/>
@@ -13858,6 +14362,7 @@
               </a:defRPr>
             </a:defPPr>
             <a:lvl1pPr>
+              <a:buNone/>
               <a:defRPr sz="1350" b="1">
                 <a:solidFill>
                   <a:srgbClr val="83E3CD"/>
@@ -13868,6 +14373,7 @@
               </a:defRPr>
             </a:lvl1pPr>
             <a:lvl2pPr>
+              <a:buNone/>
               <a:defRPr sz="1350" b="1">
                 <a:solidFill>
                   <a:srgbClr val="83E3CD"/>
@@ -13878,6 +14384,7 @@
               </a:defRPr>
             </a:lvl2pPr>
             <a:lvl3pPr>
+              <a:buNone/>
               <a:defRPr sz="1350" b="1">
                 <a:solidFill>
                   <a:srgbClr val="83E3CD"/>
@@ -13888,6 +14395,7 @@
               </a:defRPr>
             </a:lvl3pPr>
             <a:lvl4pPr>
+              <a:buNone/>
               <a:defRPr sz="1350" b="1">
                 <a:solidFill>
                   <a:srgbClr val="83E3CD"/>
@@ -13898,6 +14406,7 @@
               </a:defRPr>
             </a:lvl4pPr>
             <a:lvl5pPr>
+              <a:buNone/>
               <a:defRPr sz="1350" b="1">
                 <a:solidFill>
                   <a:srgbClr val="83E3CD"/>
@@ -13908,6 +14417,7 @@
               </a:defRPr>
             </a:lvl5pPr>
             <a:lvl6pPr>
+              <a:buNone/>
               <a:defRPr sz="1350" b="1">
                 <a:solidFill>
                   <a:srgbClr val="83E3CD"/>
@@ -13918,6 +14428,7 @@
               </a:defRPr>
             </a:lvl6pPr>
             <a:lvl7pPr>
+              <a:buNone/>
               <a:defRPr sz="1350" b="1">
                 <a:solidFill>
                   <a:srgbClr val="83E3CD"/>
@@ -13928,6 +14439,7 @@
               </a:defRPr>
             </a:lvl7pPr>
             <a:lvl8pPr>
+              <a:buNone/>
               <a:defRPr sz="1350" b="1">
                 <a:solidFill>
                   <a:srgbClr val="83E3CD"/>
@@ -13938,6 +14450,7 @@
               </a:defRPr>
             </a:lvl8pPr>
             <a:lvl9pPr>
+              <a:buNone/>
               <a:defRPr sz="1350" b="1">
                 <a:solidFill>
                   <a:srgbClr val="83E3CD"/>
@@ -13950,6 +14463,7 @@
           </a:lstStyle>
           <a:p xmlns:a="http://schemas.openxmlformats.org/drawingml/2006/main">
             <a:pPr>
+              <a:buNone/>
               <a:defRPr sz="1350" b="1">
                 <a:solidFill>
                   <a:srgbClr val="83E3CD"/>
@@ -13978,7 +14492,7 @@
           <p:cNvPr id="5" name="">
             <a:extLst xmlns:a="http://schemas.openxmlformats.org/drawingml/2006/main">
               <a:ext uri="{FF2B5EF4-FFF2-40B4-BE49-F238E27FC236}">
-                <a16:creationId xmlns:a16="http://schemas.microsoft.com/office/drawing/2014/main" id="{8BED7829-7A55-45B5-96A8-BDF474753811}"/>
+                <a16:creationId xmlns:a16="http://schemas.microsoft.com/office/drawing/2014/main" id="{5E924E9F-74ED-49B6-9F9A-8E550A28CF0C}"/>
               </a:ext>
             </a:extLst>
           </p:cNvPr>
@@ -13988,7 +14502,7 @@
           <p:nvPr/>
         </p:nvPicPr>
         <p:blipFill>
-          <a:blip xmlns:r="http://schemas.openxmlformats.org/officeDocument/2006/relationships" xmlns:a="http://schemas.openxmlformats.org/drawingml/2006/main" r:embed="R4d1a5be9fc5d4434"/>
+          <a:blip xmlns:r="http://schemas.openxmlformats.org/officeDocument/2006/relationships" xmlns:a="http://schemas.openxmlformats.org/drawingml/2006/main" r:embed="R6351892adfa44427"/>
           <a:srcRect xmlns:a="http://schemas.openxmlformats.org/drawingml/2006/main" l="0" t="23500" r="0" b="8500"/>
           <a:stretch xmlns:a="http://schemas.openxmlformats.org/drawingml/2006/main"/>
         </p:blipFill>
@@ -14045,6 +14559,7 @@
               </a:defRPr>
             </a:defPPr>
             <a:lvl1pPr>
+              <a:buNone/>
               <a:defRPr sz="2175" b="1">
                 <a:solidFill>
                   <a:srgbClr val="83E3CD"/>
@@ -14055,6 +14570,7 @@
               </a:defRPr>
             </a:lvl1pPr>
             <a:lvl2pPr>
+              <a:buNone/>
               <a:defRPr sz="2175" b="1">
                 <a:solidFill>
                   <a:srgbClr val="83E3CD"/>
@@ -14065,6 +14581,7 @@
               </a:defRPr>
             </a:lvl2pPr>
             <a:lvl3pPr>
+              <a:buNone/>
               <a:defRPr sz="2175" b="1">
                 <a:solidFill>
                   <a:srgbClr val="83E3CD"/>
@@ -14075,6 +14592,7 @@
               </a:defRPr>
             </a:lvl3pPr>
             <a:lvl4pPr>
+              <a:buNone/>
               <a:defRPr sz="2175" b="1">
                 <a:solidFill>
                   <a:srgbClr val="83E3CD"/>
@@ -14085,6 +14603,7 @@
               </a:defRPr>
             </a:lvl4pPr>
             <a:lvl5pPr>
+              <a:buNone/>
               <a:defRPr sz="2175" b="1">
                 <a:solidFill>
                   <a:srgbClr val="83E3CD"/>
@@ -14095,6 +14614,7 @@
               </a:defRPr>
             </a:lvl5pPr>
             <a:lvl6pPr>
+              <a:buNone/>
               <a:defRPr sz="2175" b="1">
                 <a:solidFill>
                   <a:srgbClr val="83E3CD"/>
@@ -14105,6 +14625,7 @@
               </a:defRPr>
             </a:lvl6pPr>
             <a:lvl7pPr>
+              <a:buNone/>
               <a:defRPr sz="2175" b="1">
                 <a:solidFill>
                   <a:srgbClr val="83E3CD"/>
@@ -14115,6 +14636,7 @@
               </a:defRPr>
             </a:lvl7pPr>
             <a:lvl8pPr>
+              <a:buNone/>
               <a:defRPr sz="2175" b="1">
                 <a:solidFill>
                   <a:srgbClr val="83E3CD"/>
@@ -14125,6 +14647,7 @@
               </a:defRPr>
             </a:lvl8pPr>
             <a:lvl9pPr>
+              <a:buNone/>
               <a:defRPr sz="2175" b="1">
                 <a:solidFill>
                   <a:srgbClr val="83E3CD"/>
@@ -14137,6 +14660,7 @@
           </a:lstStyle>
           <a:p xmlns:a="http://schemas.openxmlformats.org/drawingml/2006/main">
             <a:pPr>
+              <a:buNone/>
               <a:defRPr sz="2175" b="1">
                 <a:solidFill>
                   <a:srgbClr val="83E3CD"/>
@@ -14203,6 +14727,7 @@
               </a:defRPr>
             </a:defPPr>
             <a:lvl1pPr>
+              <a:buNone/>
               <a:defRPr sz="1950" b="0">
                 <a:solidFill>
                   <a:srgbClr val="F7FAF8"/>
@@ -14213,6 +14738,7 @@
               </a:defRPr>
             </a:lvl1pPr>
             <a:lvl2pPr>
+              <a:buNone/>
               <a:defRPr sz="1950" b="0">
                 <a:solidFill>
                   <a:srgbClr val="F7FAF8"/>
@@ -14223,6 +14749,7 @@
               </a:defRPr>
             </a:lvl2pPr>
             <a:lvl3pPr>
+              <a:buNone/>
               <a:defRPr sz="1950" b="0">
                 <a:solidFill>
                   <a:srgbClr val="F7FAF8"/>
@@ -14233,6 +14760,7 @@
               </a:defRPr>
             </a:lvl3pPr>
             <a:lvl4pPr>
+              <a:buNone/>
               <a:defRPr sz="1950" b="0">
                 <a:solidFill>
                   <a:srgbClr val="F7FAF8"/>
@@ -14243,6 +14771,7 @@
               </a:defRPr>
             </a:lvl4pPr>
             <a:lvl5pPr>
+              <a:buNone/>
               <a:defRPr sz="1950" b="0">
                 <a:solidFill>
                   <a:srgbClr val="F7FAF8"/>
@@ -14253,6 +14782,7 @@
               </a:defRPr>
             </a:lvl5pPr>
             <a:lvl6pPr>
+              <a:buNone/>
               <a:defRPr sz="1950" b="0">
                 <a:solidFill>
                   <a:srgbClr val="F7FAF8"/>
@@ -14263,6 +14793,7 @@
               </a:defRPr>
             </a:lvl6pPr>
             <a:lvl7pPr>
+              <a:buNone/>
               <a:defRPr sz="1950" b="0">
                 <a:solidFill>
                   <a:srgbClr val="F7FAF8"/>
@@ -14273,6 +14804,7 @@
               </a:defRPr>
             </a:lvl7pPr>
             <a:lvl8pPr>
+              <a:buNone/>
               <a:defRPr sz="1950" b="0">
                 <a:solidFill>
                   <a:srgbClr val="F7FAF8"/>
@@ -14283,6 +14815,7 @@
               </a:defRPr>
             </a:lvl8pPr>
             <a:lvl9pPr>
+              <a:buNone/>
               <a:defRPr sz="1950" b="0">
                 <a:solidFill>
                   <a:srgbClr val="F7FAF8"/>
@@ -14295,6 +14828,7 @@
           </a:lstStyle>
           <a:p xmlns:a="http://schemas.openxmlformats.org/drawingml/2006/main">
             <a:pPr>
+              <a:buNone/>
               <a:defRPr sz="1950" b="0">
                 <a:solidFill>
                   <a:srgbClr val="F7FAF8"/>
@@ -14352,7 +14886,7 @@
           <p:cNvPr id="10" name="">
             <a:extLst xmlns:a="http://schemas.openxmlformats.org/drawingml/2006/main">
               <a:ext uri="{FF2B5EF4-FFF2-40B4-BE49-F238E27FC236}">
-                <a16:creationId xmlns:a16="http://schemas.microsoft.com/office/drawing/2014/main" id="{AEC4ECEF-43A0-438C-ADE4-C29AD82BD98B}"/>
+                <a16:creationId xmlns:a16="http://schemas.microsoft.com/office/drawing/2014/main" id="{8E70401B-19AE-4851-974E-FCAB21B0C1E7}"/>
               </a:ext>
             </a:extLst>
           </p:cNvPr>
@@ -14362,7 +14896,7 @@
           <p:nvPr/>
         </p:nvPicPr>
         <p:blipFill>
-          <a:blip xmlns:r="http://schemas.openxmlformats.org/officeDocument/2006/relationships" xmlns:a="http://schemas.openxmlformats.org/drawingml/2006/main" r:embed="Re2600bf5ce844cd9"/>
+          <a:blip xmlns:r="http://schemas.openxmlformats.org/officeDocument/2006/relationships" xmlns:a="http://schemas.openxmlformats.org/drawingml/2006/main" r:embed="R16cf9f90bb1a4566"/>
           <a:stretch xmlns:a="http://schemas.openxmlformats.org/drawingml/2006/main"/>
         </p:blipFill>
         <p:spPr>
@@ -14418,6 +14952,7 @@
               </a:defRPr>
             </a:defPPr>
             <a:lvl1pPr>
+              <a:buNone/>
               <a:defRPr sz="1500" b="1">
                 <a:solidFill>
                   <a:srgbClr val="83E3CD"/>
@@ -14428,6 +14963,7 @@
               </a:defRPr>
             </a:lvl1pPr>
             <a:lvl2pPr>
+              <a:buNone/>
               <a:defRPr sz="1500" b="1">
                 <a:solidFill>
                   <a:srgbClr val="83E3CD"/>
@@ -14438,6 +14974,7 @@
               </a:defRPr>
             </a:lvl2pPr>
             <a:lvl3pPr>
+              <a:buNone/>
               <a:defRPr sz="1500" b="1">
                 <a:solidFill>
                   <a:srgbClr val="83E3CD"/>
@@ -14448,6 +14985,7 @@
               </a:defRPr>
             </a:lvl3pPr>
             <a:lvl4pPr>
+              <a:buNone/>
               <a:defRPr sz="1500" b="1">
                 <a:solidFill>
                   <a:srgbClr val="83E3CD"/>
@@ -14458,6 +14996,7 @@
               </a:defRPr>
             </a:lvl4pPr>
             <a:lvl5pPr>
+              <a:buNone/>
               <a:defRPr sz="1500" b="1">
                 <a:solidFill>
                   <a:srgbClr val="83E3CD"/>
@@ -14468,6 +15007,7 @@
               </a:defRPr>
             </a:lvl5pPr>
             <a:lvl6pPr>
+              <a:buNone/>
               <a:defRPr sz="1500" b="1">
                 <a:solidFill>
                   <a:srgbClr val="83E3CD"/>
@@ -14478,6 +15018,7 @@
               </a:defRPr>
             </a:lvl6pPr>
             <a:lvl7pPr>
+              <a:buNone/>
               <a:defRPr sz="1500" b="1">
                 <a:solidFill>
                   <a:srgbClr val="83E3CD"/>
@@ -14488,6 +15029,7 @@
               </a:defRPr>
             </a:lvl7pPr>
             <a:lvl8pPr>
+              <a:buNone/>
               <a:defRPr sz="1500" b="1">
                 <a:solidFill>
                   <a:srgbClr val="83E3CD"/>
@@ -14498,6 +15040,7 @@
               </a:defRPr>
             </a:lvl8pPr>
             <a:lvl9pPr>
+              <a:buNone/>
               <a:defRPr sz="1500" b="1">
                 <a:solidFill>
                   <a:srgbClr val="83E3CD"/>
@@ -14510,6 +15053,7 @@
           </a:lstStyle>
           <a:p xmlns:a="http://schemas.openxmlformats.org/drawingml/2006/main">
             <a:pPr>
+              <a:buNone/>
               <a:defRPr sz="1500" b="1">
                 <a:solidFill>
                   <a:srgbClr val="83E3CD"/>
@@ -14576,6 +15120,7 @@
               </a:defRPr>
             </a:defPPr>
             <a:lvl1pPr>
+              <a:buNone/>
               <a:defRPr sz="3900" b="1">
                 <a:solidFill>
                   <a:srgbClr val="F7FAF8"/>
@@ -14586,6 +15131,7 @@
               </a:defRPr>
             </a:lvl1pPr>
             <a:lvl2pPr>
+              <a:buNone/>
               <a:defRPr sz="3900" b="1">
                 <a:solidFill>
                   <a:srgbClr val="F7FAF8"/>
@@ -14596,6 +15142,7 @@
               </a:defRPr>
             </a:lvl2pPr>
             <a:lvl3pPr>
+              <a:buNone/>
               <a:defRPr sz="3900" b="1">
                 <a:solidFill>
                   <a:srgbClr val="F7FAF8"/>
@@ -14606,6 +15153,7 @@
               </a:defRPr>
             </a:lvl3pPr>
             <a:lvl4pPr>
+              <a:buNone/>
               <a:defRPr sz="3900" b="1">
                 <a:solidFill>
                   <a:srgbClr val="F7FAF8"/>
@@ -14616,6 +15164,7 @@
               </a:defRPr>
             </a:lvl4pPr>
             <a:lvl5pPr>
+              <a:buNone/>
               <a:defRPr sz="3900" b="1">
                 <a:solidFill>
                   <a:srgbClr val="F7FAF8"/>
@@ -14626,6 +15175,7 @@
               </a:defRPr>
             </a:lvl5pPr>
             <a:lvl6pPr>
+              <a:buNone/>
               <a:defRPr sz="3900" b="1">
                 <a:solidFill>
                   <a:srgbClr val="F7FAF8"/>
@@ -14636,6 +15186,7 @@
               </a:defRPr>
             </a:lvl6pPr>
             <a:lvl7pPr>
+              <a:buNone/>
               <a:defRPr sz="3900" b="1">
                 <a:solidFill>
                   <a:srgbClr val="F7FAF8"/>
@@ -14646,6 +15197,7 @@
               </a:defRPr>
             </a:lvl7pPr>
             <a:lvl8pPr>
+              <a:buNone/>
               <a:defRPr sz="3900" b="1">
                 <a:solidFill>
                   <a:srgbClr val="F7FAF8"/>
@@ -14656,6 +15208,7 @@
               </a:defRPr>
             </a:lvl8pPr>
             <a:lvl9pPr>
+              <a:buNone/>
               <a:defRPr sz="3900" b="1">
                 <a:solidFill>
                   <a:srgbClr val="F7FAF8"/>
@@ -14668,6 +15221,7 @@
           </a:lstStyle>
           <a:p xmlns:a="http://schemas.openxmlformats.org/drawingml/2006/main">
             <a:pPr>
+              <a:buNone/>
               <a:defRPr sz="3900" b="1">
                 <a:solidFill>
                   <a:srgbClr val="F7FAF8"/>
@@ -14691,6 +15245,7 @@
           </a:p>
           <a:p xmlns:a="http://schemas.openxmlformats.org/drawingml/2006/main">
             <a:pPr>
+              <a:buNone/>
               <a:defRPr sz="3900" b="1">
                 <a:solidFill>
                   <a:srgbClr val="F7FAF8"/>
@@ -14757,6 +15312,7 @@
               </a:defRPr>
             </a:defPPr>
             <a:lvl1pPr>
+              <a:buNone/>
               <a:defRPr sz="2325" b="1">
                 <a:solidFill>
                   <a:srgbClr val="83E3CD"/>
@@ -14767,6 +15323,7 @@
               </a:defRPr>
             </a:lvl1pPr>
             <a:lvl2pPr>
+              <a:buNone/>
               <a:defRPr sz="2325" b="1">
                 <a:solidFill>
                   <a:srgbClr val="83E3CD"/>
@@ -14777,6 +15334,7 @@
               </a:defRPr>
             </a:lvl2pPr>
             <a:lvl3pPr>
+              <a:buNone/>
               <a:defRPr sz="2325" b="1">
                 <a:solidFill>
                   <a:srgbClr val="83E3CD"/>
@@ -14787,6 +15345,7 @@
               </a:defRPr>
             </a:lvl3pPr>
             <a:lvl4pPr>
+              <a:buNone/>
               <a:defRPr sz="2325" b="1">
                 <a:solidFill>
                   <a:srgbClr val="83E3CD"/>
@@ -14797,6 +15356,7 @@
               </a:defRPr>
             </a:lvl4pPr>
             <a:lvl5pPr>
+              <a:buNone/>
               <a:defRPr sz="2325" b="1">
                 <a:solidFill>
                   <a:srgbClr val="83E3CD"/>
@@ -14807,6 +15367,7 @@
               </a:defRPr>
             </a:lvl5pPr>
             <a:lvl6pPr>
+              <a:buNone/>
               <a:defRPr sz="2325" b="1">
                 <a:solidFill>
                   <a:srgbClr val="83E3CD"/>
@@ -14817,6 +15378,7 @@
               </a:defRPr>
             </a:lvl6pPr>
             <a:lvl7pPr>
+              <a:buNone/>
               <a:defRPr sz="2325" b="1">
                 <a:solidFill>
                   <a:srgbClr val="83E3CD"/>
@@ -14827,6 +15389,7 @@
               </a:defRPr>
             </a:lvl7pPr>
             <a:lvl8pPr>
+              <a:buNone/>
               <a:defRPr sz="2325" b="1">
                 <a:solidFill>
                   <a:srgbClr val="83E3CD"/>
@@ -14837,6 +15400,7 @@
               </a:defRPr>
             </a:lvl8pPr>
             <a:lvl9pPr>
+              <a:buNone/>
               <a:defRPr sz="2325" b="1">
                 <a:solidFill>
                   <a:srgbClr val="83E3CD"/>
@@ -14849,6 +15413,7 @@
           </a:lstStyle>
           <a:p xmlns:a="http://schemas.openxmlformats.org/drawingml/2006/main">
             <a:pPr>
+              <a:buNone/>
               <a:defRPr sz="2325" b="1">
                 <a:solidFill>
                   <a:srgbClr val="83E3CD"/>
@@ -14915,6 +15480,7 @@
               </a:defRPr>
             </a:defPPr>
             <a:lvl1pPr>
+              <a:buNone/>
               <a:defRPr sz="2025" b="0">
                 <a:solidFill>
                   <a:srgbClr val="F7FAF8"/>
@@ -14925,6 +15491,7 @@
               </a:defRPr>
             </a:lvl1pPr>
             <a:lvl2pPr>
+              <a:buNone/>
               <a:defRPr sz="2025" b="0">
                 <a:solidFill>
                   <a:srgbClr val="F7FAF8"/>
@@ -14935,6 +15502,7 @@
               </a:defRPr>
             </a:lvl2pPr>
             <a:lvl3pPr>
+              <a:buNone/>
               <a:defRPr sz="2025" b="0">
                 <a:solidFill>
                   <a:srgbClr val="F7FAF8"/>
@@ -14945,6 +15513,7 @@
               </a:defRPr>
             </a:lvl3pPr>
             <a:lvl4pPr>
+              <a:buNone/>
               <a:defRPr sz="2025" b="0">
                 <a:solidFill>
                   <a:srgbClr val="F7FAF8"/>
@@ -14955,6 +15524,7 @@
               </a:defRPr>
             </a:lvl4pPr>
             <a:lvl5pPr>
+              <a:buNone/>
               <a:defRPr sz="2025" b="0">
                 <a:solidFill>
                   <a:srgbClr val="F7FAF8"/>
@@ -14965,6 +15535,7 @@
               </a:defRPr>
             </a:lvl5pPr>
             <a:lvl6pPr>
+              <a:buNone/>
               <a:defRPr sz="2025" b="0">
                 <a:solidFill>
                   <a:srgbClr val="F7FAF8"/>
@@ -14975,6 +15546,7 @@
               </a:defRPr>
             </a:lvl6pPr>
             <a:lvl7pPr>
+              <a:buNone/>
               <a:defRPr sz="2025" b="0">
                 <a:solidFill>
                   <a:srgbClr val="F7FAF8"/>
@@ -14985,6 +15557,7 @@
               </a:defRPr>
             </a:lvl7pPr>
             <a:lvl8pPr>
+              <a:buNone/>
               <a:defRPr sz="2025" b="0">
                 <a:solidFill>
                   <a:srgbClr val="F7FAF8"/>
@@ -14995,6 +15568,7 @@
               </a:defRPr>
             </a:lvl8pPr>
             <a:lvl9pPr>
+              <a:buNone/>
               <a:defRPr sz="2025" b="0">
                 <a:solidFill>
                   <a:srgbClr val="F7FAF8"/>
@@ -15007,6 +15581,7 @@
           </a:lstStyle>
           <a:p xmlns:a="http://schemas.openxmlformats.org/drawingml/2006/main">
             <a:pPr>
+              <a:buNone/>
               <a:defRPr sz="2025" b="0">
                 <a:solidFill>
                   <a:srgbClr val="F7FAF8"/>
@@ -15073,6 +15648,7 @@
               </a:defRPr>
             </a:defPPr>
             <a:lvl1pPr>
+              <a:buNone/>
               <a:defRPr sz="2325" b="1">
                 <a:solidFill>
                   <a:srgbClr val="83E3CD"/>
@@ -15083,6 +15659,7 @@
               </a:defRPr>
             </a:lvl1pPr>
             <a:lvl2pPr>
+              <a:buNone/>
               <a:defRPr sz="2325" b="1">
                 <a:solidFill>
                   <a:srgbClr val="83E3CD"/>
@@ -15093,6 +15670,7 @@
               </a:defRPr>
             </a:lvl2pPr>
             <a:lvl3pPr>
+              <a:buNone/>
               <a:defRPr sz="2325" b="1">
                 <a:solidFill>
                   <a:srgbClr val="83E3CD"/>
@@ -15103,6 +15681,7 @@
               </a:defRPr>
             </a:lvl3pPr>
             <a:lvl4pPr>
+              <a:buNone/>
               <a:defRPr sz="2325" b="1">
                 <a:solidFill>
                   <a:srgbClr val="83E3CD"/>
@@ -15113,6 +15692,7 @@
               </a:defRPr>
             </a:lvl4pPr>
             <a:lvl5pPr>
+              <a:buNone/>
               <a:defRPr sz="2325" b="1">
                 <a:solidFill>
                   <a:srgbClr val="83E3CD"/>
@@ -15123,6 +15703,7 @@
               </a:defRPr>
             </a:lvl5pPr>
             <a:lvl6pPr>
+              <a:buNone/>
               <a:defRPr sz="2325" b="1">
                 <a:solidFill>
                   <a:srgbClr val="83E3CD"/>
@@ -15133,6 +15714,7 @@
               </a:defRPr>
             </a:lvl6pPr>
             <a:lvl7pPr>
+              <a:buNone/>
               <a:defRPr sz="2325" b="1">
                 <a:solidFill>
                   <a:srgbClr val="83E3CD"/>
@@ -15143,6 +15725,7 @@
               </a:defRPr>
             </a:lvl7pPr>
             <a:lvl8pPr>
+              <a:buNone/>
               <a:defRPr sz="2325" b="1">
                 <a:solidFill>
                   <a:srgbClr val="83E3CD"/>
@@ -15153,6 +15736,7 @@
               </a:defRPr>
             </a:lvl8pPr>
             <a:lvl9pPr>
+              <a:buNone/>
               <a:defRPr sz="2325" b="1">
                 <a:solidFill>
                   <a:srgbClr val="83E3CD"/>
@@ -15165,6 +15749,7 @@
           </a:lstStyle>
           <a:p xmlns:a="http://schemas.openxmlformats.org/drawingml/2006/main">
             <a:pPr>
+              <a:buNone/>
               <a:defRPr sz="2325" b="1">
                 <a:solidFill>
                   <a:srgbClr val="83E3CD"/>
@@ -15231,6 +15816,7 @@
               </a:defRPr>
             </a:defPPr>
             <a:lvl1pPr>
+              <a:buNone/>
               <a:defRPr sz="2025" b="0">
                 <a:solidFill>
                   <a:srgbClr val="F7FAF8"/>
@@ -15241,6 +15827,7 @@
               </a:defRPr>
             </a:lvl1pPr>
             <a:lvl2pPr>
+              <a:buNone/>
               <a:defRPr sz="2025" b="0">
                 <a:solidFill>
                   <a:srgbClr val="F7FAF8"/>
@@ -15251,6 +15838,7 @@
               </a:defRPr>
             </a:lvl2pPr>
             <a:lvl3pPr>
+              <a:buNone/>
               <a:defRPr sz="2025" b="0">
                 <a:solidFill>
                   <a:srgbClr val="F7FAF8"/>
@@ -15261,6 +15849,7 @@
               </a:defRPr>
             </a:lvl3pPr>
             <a:lvl4pPr>
+              <a:buNone/>
               <a:defRPr sz="2025" b="0">
                 <a:solidFill>
                   <a:srgbClr val="F7FAF8"/>
@@ -15271,6 +15860,7 @@
               </a:defRPr>
             </a:lvl4pPr>
             <a:lvl5pPr>
+              <a:buNone/>
               <a:defRPr sz="2025" b="0">
                 <a:solidFill>
                   <a:srgbClr val="F7FAF8"/>
@@ -15281,6 +15871,7 @@
               </a:defRPr>
             </a:lvl5pPr>
             <a:lvl6pPr>
+              <a:buNone/>
               <a:defRPr sz="2025" b="0">
                 <a:solidFill>
                   <a:srgbClr val="F7FAF8"/>
@@ -15291,6 +15882,7 @@
               </a:defRPr>
             </a:lvl6pPr>
             <a:lvl7pPr>
+              <a:buNone/>
               <a:defRPr sz="2025" b="0">
                 <a:solidFill>
                   <a:srgbClr val="F7FAF8"/>
@@ -15301,6 +15893,7 @@
               </a:defRPr>
             </a:lvl7pPr>
             <a:lvl8pPr>
+              <a:buNone/>
               <a:defRPr sz="2025" b="0">
                 <a:solidFill>
                   <a:srgbClr val="F7FAF8"/>
@@ -15311,6 +15904,7 @@
               </a:defRPr>
             </a:lvl8pPr>
             <a:lvl9pPr>
+              <a:buNone/>
               <a:defRPr sz="2025" b="0">
                 <a:solidFill>
                   <a:srgbClr val="F7FAF8"/>
@@ -15323,6 +15917,7 @@
           </a:lstStyle>
           <a:p xmlns:a="http://schemas.openxmlformats.org/drawingml/2006/main">
             <a:pPr>
+              <a:buNone/>
               <a:defRPr sz="2025" b="0">
                 <a:solidFill>
                   <a:srgbClr val="F7FAF8"/>
@@ -15389,6 +15984,7 @@
               </a:defRPr>
             </a:defPPr>
             <a:lvl1pPr>
+              <a:buNone/>
               <a:defRPr sz="1725" b="0">
                 <a:solidFill>
                   <a:srgbClr val="B9CFD2"/>
@@ -15399,6 +15995,7 @@
               </a:defRPr>
             </a:lvl1pPr>
             <a:lvl2pPr>
+              <a:buNone/>
               <a:defRPr sz="1725" b="0">
                 <a:solidFill>
                   <a:srgbClr val="B9CFD2"/>
@@ -15409,6 +16006,7 @@
               </a:defRPr>
             </a:lvl2pPr>
             <a:lvl3pPr>
+              <a:buNone/>
               <a:defRPr sz="1725" b="0">
                 <a:solidFill>
                   <a:srgbClr val="B9CFD2"/>
@@ -15419,6 +16017,7 @@
               </a:defRPr>
             </a:lvl3pPr>
             <a:lvl4pPr>
+              <a:buNone/>
               <a:defRPr sz="1725" b="0">
                 <a:solidFill>
                   <a:srgbClr val="B9CFD2"/>
@@ -15429,6 +16028,7 @@
               </a:defRPr>
             </a:lvl4pPr>
             <a:lvl5pPr>
+              <a:buNone/>
               <a:defRPr sz="1725" b="0">
                 <a:solidFill>
                   <a:srgbClr val="B9CFD2"/>
@@ -15439,6 +16039,7 @@
               </a:defRPr>
             </a:lvl5pPr>
             <a:lvl6pPr>
+              <a:buNone/>
               <a:defRPr sz="1725" b="0">
                 <a:solidFill>
                   <a:srgbClr val="B9CFD2"/>
@@ -15449,6 +16050,7 @@
               </a:defRPr>
             </a:lvl6pPr>
             <a:lvl7pPr>
+              <a:buNone/>
               <a:defRPr sz="1725" b="0">
                 <a:solidFill>
                   <a:srgbClr val="B9CFD2"/>
@@ -15459,6 +16061,7 @@
               </a:defRPr>
             </a:lvl7pPr>
             <a:lvl8pPr>
+              <a:buNone/>
               <a:defRPr sz="1725" b="0">
                 <a:solidFill>
                   <a:srgbClr val="B9CFD2"/>
@@ -15469,6 +16072,7 @@
               </a:defRPr>
             </a:lvl8pPr>
             <a:lvl9pPr>
+              <a:buNone/>
               <a:defRPr sz="1725" b="0">
                 <a:solidFill>
                   <a:srgbClr val="B9CFD2"/>
@@ -15481,6 +16085,7 @@
           </a:lstStyle>
           <a:p xmlns:a="http://schemas.openxmlformats.org/drawingml/2006/main">
             <a:pPr>
+              <a:buNone/>
               <a:defRPr sz="1725" b="0">
                 <a:solidFill>
                   <a:srgbClr val="B9CFD2"/>
@@ -15504,6 +16109,7 @@
           </a:p>
           <a:p xmlns:a="http://schemas.openxmlformats.org/drawingml/2006/main">
             <a:pPr>
+              <a:buNone/>
               <a:defRPr sz="1725" b="0">
                 <a:solidFill>
                   <a:srgbClr val="B9CFD2"/>
@@ -15570,6 +16176,7 @@
               </a:defRPr>
             </a:defPPr>
             <a:lvl1pPr>
+              <a:buNone/>
               <a:defRPr sz="1350" b="0">
                 <a:solidFill>
                   <a:srgbClr val="83E3CD"/>
@@ -15580,6 +16187,7 @@
               </a:defRPr>
             </a:lvl1pPr>
             <a:lvl2pPr>
+              <a:buNone/>
               <a:defRPr sz="1350" b="0">
                 <a:solidFill>
                   <a:srgbClr val="83E3CD"/>
@@ -15590,6 +16198,7 @@
               </a:defRPr>
             </a:lvl2pPr>
             <a:lvl3pPr>
+              <a:buNone/>
               <a:defRPr sz="1350" b="0">
                 <a:solidFill>
                   <a:srgbClr val="83E3CD"/>
@@ -15600,6 +16209,7 @@
               </a:defRPr>
             </a:lvl3pPr>
             <a:lvl4pPr>
+              <a:buNone/>
               <a:defRPr sz="1350" b="0">
                 <a:solidFill>
                   <a:srgbClr val="83E3CD"/>
@@ -15610,6 +16220,7 @@
               </a:defRPr>
             </a:lvl4pPr>
             <a:lvl5pPr>
+              <a:buNone/>
               <a:defRPr sz="1350" b="0">
                 <a:solidFill>
                   <a:srgbClr val="83E3CD"/>
@@ -15620,6 +16231,7 @@
               </a:defRPr>
             </a:lvl5pPr>
             <a:lvl6pPr>
+              <a:buNone/>
               <a:defRPr sz="1350" b="0">
                 <a:solidFill>
                   <a:srgbClr val="83E3CD"/>
@@ -15630,6 +16242,7 @@
               </a:defRPr>
             </a:lvl6pPr>
             <a:lvl7pPr>
+              <a:buNone/>
               <a:defRPr sz="1350" b="0">
                 <a:solidFill>
                   <a:srgbClr val="83E3CD"/>
@@ -15640,6 +16253,7 @@
               </a:defRPr>
             </a:lvl7pPr>
             <a:lvl8pPr>
+              <a:buNone/>
               <a:defRPr sz="1350" b="0">
                 <a:solidFill>
                   <a:srgbClr val="83E3CD"/>
@@ -15650,6 +16264,7 @@
               </a:defRPr>
             </a:lvl8pPr>
             <a:lvl9pPr>
+              <a:buNone/>
               <a:defRPr sz="1350" b="0">
                 <a:solidFill>
                   <a:srgbClr val="83E3CD"/>
@@ -15662,6 +16277,7 @@
           </a:lstStyle>
           <a:p xmlns:a="http://schemas.openxmlformats.org/drawingml/2006/main">
             <a:pPr>
+              <a:buNone/>
               <a:defRPr sz="1350" b="0">
                 <a:solidFill>
                   <a:srgbClr val="83E3CD"/>
